--- a/presentation/Network_Journal_Presentation.pptx
+++ b/presentation/Network_Journal_Presentation.pptx
@@ -3307,6 +3307,93 @@
               </a:rPr>
               <a:t>Final architecture: leakage-safe features · anchored fusion · TreeSHAP RCA
 Verified T1 AUPRC = 0.1152  |  RF baseline = 0.0758  |  Six frozen seeds</a:t>
+            </a:r>
+          </a:p>
+        </p:txBody>
+      </p:sp>
+      <p:sp>
+        <p:nvSpPr>
+          <p:cNvPr id="7" name="TextBox 6"/>
+          <p:cNvSpPr txBox="1"/>
+          <p:nvPr/>
+        </p:nvSpPr>
+        <p:spPr>
+          <a:xfrm>
+            <a:off x="640080" y="4160520"/>
+            <a:ext cx="10972800" cy="1143000"/>
+          </a:xfrm>
+          <a:prstGeom prst="rect">
+            <a:avLst/>
+          </a:prstGeom>
+          <a:noFill/>
+        </p:spPr>
+        <p:txBody>
+          <a:bodyPr wrap="square">
+            <a:spAutoFit/>
+          </a:bodyPr>
+          <a:lstStyle/>
+          <a:p>
+            <a:pPr algn="l">
+              <a:spcAft>
+                <a:spcPts val="200"/>
+              </a:spcAft>
+            </a:pPr>
+            <a:r>
+              <a:rPr sz="1600" b="1">
+                <a:solidFill>
+                  <a:srgbClr val="FFFFFF"/>
+                </a:solidFill>
+                <a:latin typeface="Calibri"/>
+              </a:rPr>
+              <a:t>Audrey Rah</a:t>
+            </a:r>
+          </a:p>
+          <a:p>
+            <a:pPr algn="l">
+              <a:spcAft>
+                <a:spcPts val="200"/>
+              </a:spcAft>
+            </a:pPr>
+            <a:r>
+              <a:rPr sz="1300" b="0">
+                <a:solidFill>
+                  <a:srgbClr val="C8D8E4"/>
+                </a:solidFill>
+                <a:latin typeface="Calibri"/>
+              </a:rPr>
+              <a:t>Department of Electrical and Computer Engineering</a:t>
+            </a:r>
+          </a:p>
+          <a:p>
+            <a:pPr algn="l">
+              <a:spcAft>
+                <a:spcPts val="200"/>
+              </a:spcAft>
+            </a:pPr>
+            <a:r>
+              <a:rPr sz="1300" b="0">
+                <a:solidFill>
+                  <a:srgbClr val="C8D8E4"/>
+                </a:solidFill>
+                <a:latin typeface="Calibri"/>
+              </a:rPr>
+              <a:t>University of Houston</a:t>
+            </a:r>
+          </a:p>
+          <a:p>
+            <a:pPr algn="l">
+              <a:spcAft>
+                <a:spcPts val="200"/>
+              </a:spcAft>
+            </a:pPr>
+            <a:r>
+              <a:rPr sz="1300" b="0">
+                <a:solidFill>
+                  <a:srgbClr val="C8D8E4"/>
+                </a:solidFill>
+                <a:latin typeface="Calibri"/>
+              </a:rPr>
+              <a:t>August 2026</a:t>
             </a:r>
           </a:p>
         </p:txBody>

--- a/presentation/Network_Journal_Presentation.pptx
+++ b/presentation/Network_Journal_Presentation.pptx
@@ -39,6 +39,7 @@
     <p:sldId id="287" r:id="rId38"/>
     <p:sldId id="288" r:id="rId39"/>
     <p:sldId id="289" r:id="rId40"/>
+    <p:sldId id="290" r:id="rId41"/>
   </p:sldIdLst>
   <p:sldSz cx="12191695" cy="6858000" type="screen4x3"/>
   <p:notesSz cx="6858000" cy="9144000"/>
@@ -3284,41 +3285,6 @@
         </p:nvSpPr>
         <p:spPr>
           <a:xfrm>
-            <a:off x="640080" y="5669280"/>
-            <a:ext cx="10972800" cy="822960"/>
-          </a:xfrm>
-          <a:prstGeom prst="rect">
-            <a:avLst/>
-          </a:prstGeom>
-          <a:noFill/>
-        </p:spPr>
-        <p:txBody>
-          <a:bodyPr wrap="none">
-            <a:spAutoFit/>
-          </a:bodyPr>
-          <a:lstStyle/>
-          <a:p>
-            <a:r>
-              <a:rPr sz="1400" b="0">
-                <a:solidFill>
-                  <a:srgbClr val="FFFFFF"/>
-                </a:solidFill>
-                <a:latin typeface="Calibri"/>
-              </a:rPr>
-              <a:t>Final architecture: leakage-safe features · anchored fusion · TreeSHAP RCA
-Verified T1 AUPRC = 0.1152  |  RF baseline = 0.0758  |  Six frozen seeds</a:t>
-            </a:r>
-          </a:p>
-        </p:txBody>
-      </p:sp>
-      <p:sp>
-        <p:nvSpPr>
-          <p:cNvPr id="7" name="TextBox 6"/>
-          <p:cNvSpPr txBox="1"/>
-          <p:nvPr/>
-        </p:nvSpPr>
-        <p:spPr>
-          <a:xfrm>
             <a:off x="640080" y="4160520"/>
             <a:ext cx="10972800" cy="1143000"/>
           </a:xfrm>
@@ -3333,7 +3299,7 @@
           </a:bodyPr>
           <a:lstStyle/>
           <a:p>
-            <a:pPr algn="l">
+            <a:pPr>
               <a:spcAft>
                 <a:spcPts val="200"/>
               </a:spcAft>
@@ -3349,7 +3315,7 @@
             </a:r>
           </a:p>
           <a:p>
-            <a:pPr algn="l">
+            <a:pPr>
               <a:spcAft>
                 <a:spcPts val="200"/>
               </a:spcAft>
@@ -3365,7 +3331,7 @@
             </a:r>
           </a:p>
           <a:p>
-            <a:pPr algn="l">
+            <a:pPr>
               <a:spcAft>
                 <a:spcPts val="200"/>
               </a:spcAft>
@@ -3381,7 +3347,7 @@
             </a:r>
           </a:p>
           <a:p>
-            <a:pPr algn="l">
+            <a:pPr>
               <a:spcAft>
                 <a:spcPts val="200"/>
               </a:spcAft>
@@ -3394,6 +3360,41 @@
                 <a:latin typeface="Calibri"/>
               </a:rPr>
               <a:t>August 2026</a:t>
+            </a:r>
+          </a:p>
+        </p:txBody>
+      </p:sp>
+      <p:sp>
+        <p:nvSpPr>
+          <p:cNvPr id="7" name="TextBox 6"/>
+          <p:cNvSpPr txBox="1"/>
+          <p:nvPr/>
+        </p:nvSpPr>
+        <p:spPr>
+          <a:xfrm>
+            <a:off x="640080" y="5669280"/>
+            <a:ext cx="10972800" cy="822960"/>
+          </a:xfrm>
+          <a:prstGeom prst="rect">
+            <a:avLst/>
+          </a:prstGeom>
+          <a:noFill/>
+        </p:spPr>
+        <p:txBody>
+          <a:bodyPr wrap="none">
+            <a:spAutoFit/>
+          </a:bodyPr>
+          <a:lstStyle/>
+          <a:p>
+            <a:r>
+              <a:rPr sz="1300" b="0">
+                <a:solidFill>
+                  <a:srgbClr val="FFFFFF"/>
+                </a:solidFill>
+                <a:latin typeface="Calibri"/>
+              </a:rPr>
+              <a:t>Final architecture: leakage-safe features · anchored fusion · TreeSHAP RCA
+T1 AUPRC 0.115  |  RF 0.076  |  v2 0.058  |  Six frozen seeds  |  RF paired test non-significant</a:t>
             </a:r>
           </a:p>
         </p:txBody>
@@ -3644,7 +3645,7 @@
                 </a:solidFill>
                 <a:latin typeface="Calibri"/>
               </a:rPr>
-              <a:t>10 / 34</a:t>
+              <a:t>10 / 35</a:t>
             </a:r>
           </a:p>
         </p:txBody>
@@ -3832,7 +3833,7 @@
                 </a:solidFill>
                 <a:latin typeface="Calibri"/>
               </a:rPr>
-              <a:t>11 / 34</a:t>
+              <a:t>11 / 35</a:t>
             </a:r>
           </a:p>
         </p:txBody>
@@ -4020,7 +4021,7 @@
                 </a:solidFill>
                 <a:latin typeface="Calibri"/>
               </a:rPr>
-              <a:t>12 / 34</a:t>
+              <a:t>12 / 35</a:t>
             </a:r>
           </a:p>
         </p:txBody>
@@ -4208,7 +4209,7 @@
                 </a:solidFill>
                 <a:latin typeface="Calibri"/>
               </a:rPr>
-              <a:t>13 / 34</a:t>
+              <a:t>13 / 35</a:t>
             </a:r>
           </a:p>
         </p:txBody>
@@ -4396,7 +4397,7 @@
                 </a:solidFill>
                 <a:latin typeface="Calibri"/>
               </a:rPr>
-              <a:t>14 / 34</a:t>
+              <a:t>14 / 35</a:t>
             </a:r>
           </a:p>
         </p:txBody>
@@ -4530,7 +4531,7 @@
                 </a:solidFill>
                 <a:latin typeface="Calibri"/>
               </a:rPr>
-              <a:t>•  feat_bin = t_start − 30 minutes (features strictly precede labels)</a:t>
+              <a:t>•  Features join labels at a 30-minute decision-time offset (features strictly precede labels)</a:t>
             </a:r>
           </a:p>
           <a:p>
@@ -4546,7 +4547,7 @@
                 </a:solidFill>
                 <a:latin typeface="Calibri"/>
               </a:rPr>
-              <a:t>•  Expanding / rolling / EMA operators use shift(1) — current bin excluded</a:t>
+              <a:t>•  Rolling / expanding / EMA operators exclude the current bin via a one-step causal shift</a:t>
             </a:r>
           </a:p>
           <a:p>
@@ -4562,7 +4563,7 @@
                 </a:solidFill>
                 <a:latin typeface="Calibri"/>
               </a:rPr>
-              <a:t>•  Neighbor instability from previous-bin aggregates</a:t>
+              <a:t>•  Neighbor instability uses previous-bin aggregates only</a:t>
             </a:r>
           </a:p>
           <a:p>
@@ -4578,7 +4579,7 @@
                 </a:solidFill>
                 <a:latin typeface="Calibri"/>
               </a:rPr>
-              <a:t>•  Baselines use telem_only; proposed uses full enriched twin+telem features</a:t>
+              <a:t>•  Classical baselines train on telemetry-only matrices; proposed T1 uses enriched twin+telem + anchored fusion</a:t>
             </a:r>
           </a:p>
           <a:p>
@@ -4594,7 +4595,7 @@
                 </a:solidFill>
                 <a:latin typeface="Calibri"/>
               </a:rPr>
-              <a:t>•  Verified: temporal split integrity and lag checks on all six seeds</a:t>
+              <a:t>•  Temporal 70/15/15 freeze and lag audits on all six frozen instances</a:t>
             </a:r>
           </a:p>
         </p:txBody>
@@ -4663,7 +4664,7 @@
                 </a:solidFill>
                 <a:latin typeface="Calibri"/>
               </a:rPr>
-              <a:t>15 / 34</a:t>
+              <a:t>15 / 35</a:t>
             </a:r>
           </a:p>
         </p:txBody>
@@ -4851,7 +4852,7 @@
                 </a:solidFill>
                 <a:latin typeface="Calibri"/>
               </a:rPr>
-              <a:t>16 / 34</a:t>
+              <a:t>16 / 35</a:t>
             </a:r>
           </a:p>
         </p:txBody>
@@ -5055,7 +5056,7 @@
         <p:spPr>
           <a:xfrm>
             <a:off x="5943600" y="1234440"/>
-            <a:ext cx="5760720" cy="4754098"/>
+            <a:ext cx="5760720" cy="4929036"/>
           </a:xfrm>
           <a:prstGeom prst="rect">
             <a:avLst/>
@@ -5126,7 +5127,7 @@
                 </a:solidFill>
                 <a:latin typeface="Calibri"/>
               </a:rPr>
-              <a:t>17 / 34</a:t>
+              <a:t>17 / 35</a:t>
             </a:r>
           </a:p>
         </p:txBody>
@@ -5314,7 +5315,7 @@
                 </a:solidFill>
                 <a:latin typeface="Calibri"/>
               </a:rPr>
-              <a:t>18 / 34</a:t>
+              <a:t>18 / 35</a:t>
             </a:r>
           </a:p>
         </p:txBody>
@@ -5409,14 +5410,48 @@
                 </a:solidFill>
                 <a:latin typeface="Calibri"/>
               </a:rPr>
-              <a:t>Healing Recommendation Workflow</a:t>
+              <a:t>Healing Decision Support</a:t>
+            </a:r>
+          </a:p>
+        </p:txBody>
+      </p:sp>
+      <p:sp>
+        <p:nvSpPr>
+          <p:cNvPr id="4" name="TextBox 3"/>
+          <p:cNvSpPr txBox="1"/>
+          <p:nvPr/>
+        </p:nvSpPr>
+        <p:spPr>
+          <a:xfrm>
+            <a:off x="411480" y="621792"/>
+            <a:ext cx="11338560" cy="292608"/>
+          </a:xfrm>
+          <a:prstGeom prst="rect">
+            <a:avLst/>
+          </a:prstGeom>
+          <a:noFill/>
+        </p:spPr>
+        <p:txBody>
+          <a:bodyPr wrap="none">
+            <a:spAutoFit/>
+          </a:bodyPr>
+          <a:lstStyle/>
+          <a:p>
+            <a:r>
+              <a:rPr sz="1200" b="0">
+                <a:solidFill>
+                  <a:srgbClr val="C8D8E4"/>
+                </a:solidFill>
+                <a:latin typeface="Calibri"/>
+              </a:rPr>
+              <a:t>Recommendations with human approval — not live autonomous switch actuation</a:t>
             </a:r>
           </a:p>
         </p:txBody>
       </p:sp>
       <p:pic>
         <p:nvPicPr>
-          <p:cNvPr id="4" name="Picture 3" descr="arch_healing_workflow.png"/>
+          <p:cNvPr id="5" name="Picture 4" descr="arch_healing_workflow.png"/>
           <p:cNvPicPr>
             <a:picLocks noChangeAspect="1"/>
           </p:cNvPicPr>
@@ -5430,7 +5465,7 @@
         </p:blipFill>
         <p:spPr>
           <a:xfrm>
-            <a:off x="640080" y="1280160"/>
+            <a:off x="640080" y="1234440"/>
             <a:ext cx="10881360" cy="6223793"/>
           </a:xfrm>
           <a:prstGeom prst="rect">
@@ -5440,7 +5475,7 @@
       </p:pic>
       <p:sp>
         <p:nvSpPr>
-          <p:cNvPr id="5" name="TextBox 4"/>
+          <p:cNvPr id="6" name="TextBox 5"/>
           <p:cNvSpPr txBox="1"/>
           <p:nvPr/>
         </p:nvSpPr>
@@ -5474,7 +5509,7 @@
       </p:sp>
       <p:sp>
         <p:nvSpPr>
-          <p:cNvPr id="6" name="TextBox 5"/>
+          <p:cNvPr id="7" name="TextBox 6"/>
           <p:cNvSpPr txBox="1"/>
           <p:nvPr/>
         </p:nvSpPr>
@@ -5502,7 +5537,7 @@
                 </a:solidFill>
                 <a:latin typeface="Calibri"/>
               </a:rPr>
-              <a:t>19 / 34</a:t>
+              <a:t>19 / 35</a:t>
             </a:r>
           </a:p>
         </p:txBody>
@@ -5888,7 +5923,7 @@
                 </a:solidFill>
                 <a:latin typeface="Calibri"/>
               </a:rPr>
-              <a:t>2 / 34</a:t>
+              <a:t>2 / 35</a:t>
             </a:r>
           </a:p>
         </p:txBody>
@@ -6070,7 +6105,7 @@
                 </a:solidFill>
                 <a:latin typeface="Calibri"/>
               </a:rPr>
-              <a:t>•  Final T1: ECNFusionModel + v3 leakage-safe features</a:t>
+              <a:t>•  Final T1: leakage-safe enriched features + anchored telemetry-first fusion</a:t>
             </a:r>
           </a:p>
           <a:p>
@@ -6086,7 +6121,7 @@
                 </a:solidFill>
                 <a:latin typeface="Calibri"/>
               </a:rPr>
-              <a:t>•  T2 recommended head: telemetry logistic regression</a:t>
+              <a:t>•  T2 recommended operating head: telemetry logistic regression</a:t>
             </a:r>
           </a:p>
           <a:p>
@@ -6102,7 +6137,7 @@
                 </a:solidFill>
                 <a:latin typeface="Calibri"/>
               </a:rPr>
-              <a:t>•  Artifacts: results/manuscript_ready_numbers.json</a:t>
+              <a:t>•  Healing evaluated as decision support (human approval), not physical actuation</a:t>
             </a:r>
           </a:p>
         </p:txBody>
@@ -6171,7 +6206,7 @@
                 </a:solidFill>
                 <a:latin typeface="Calibri"/>
               </a:rPr>
-              <a:t>20 / 34</a:t>
+              <a:t>20 / 35</a:t>
             </a:r>
           </a:p>
         </p:txBody>
@@ -6279,8 +6314,8 @@
         </p:nvSpPr>
         <p:spPr>
           <a:xfrm>
-            <a:off x="640080" y="1280160"/>
-            <a:ext cx="10972800" cy="5029200"/>
+            <a:off x="640080" y="1234440"/>
+            <a:ext cx="10972800" cy="5120640"/>
           </a:xfrm>
           <a:prstGeom prst="rect">
             <a:avLst/>
@@ -6299,13 +6334,13 @@
               </a:spcAft>
             </a:pPr>
             <a:r>
-              <a:rPr sz="1700" b="0">
+              <a:rPr sz="1600" b="0">
                 <a:solidFill>
                   <a:srgbClr val="1A1A1A"/>
                 </a:solidFill>
                 <a:latin typeface="Calibri"/>
               </a:rPr>
-              <a:t>•  Logistic regression, random forest, LightGBM</a:t>
+              <a:t>•  Classical tabular: logistic regression, random forest, LightGBM, XGBoost, CatBoost, gradient boosting, balanced RF</a:t>
             </a:r>
           </a:p>
           <a:p>
@@ -6315,13 +6350,13 @@
               </a:spcAft>
             </a:pPr>
             <a:r>
-              <a:rPr sz="1700" b="0">
+              <a:rPr sz="1600" b="0">
                 <a:solidFill>
                   <a:srgbClr val="1A1A1A"/>
                 </a:solidFill>
                 <a:latin typeface="Calibri"/>
               </a:rPr>
-              <a:t>•  Isolation Forest, EWMA, threshold, majority</a:t>
+              <a:t>•  Classical detectors: Isolation Forest, EWMA, threshold rules, majority class</a:t>
             </a:r>
           </a:p>
           <a:p>
@@ -6331,13 +6366,13 @@
               </a:spcAft>
             </a:pPr>
             <a:r>
-              <a:rPr sz="1700" b="0">
+              <a:rPr sz="1600" b="0">
                 <a:solidFill>
                   <a:srgbClr val="1A1A1A"/>
                 </a:solidFill>
                 <a:latin typeface="Calibri"/>
               </a:rPr>
-              <a:t>•  MLP sequence proxy and GraphSAGE-style GNN proxy</a:t>
+              <a:t>•  Deep tabular: TabNet (telemetry-only)</a:t>
             </a:r>
           </a:p>
           <a:p>
@@ -6347,13 +6382,13 @@
               </a:spcAft>
             </a:pPr>
             <a:r>
-              <a:rPr sz="1700" b="0">
+              <a:rPr sz="1600" b="0">
                 <a:solidFill>
                   <a:srgbClr val="1A1A1A"/>
                 </a:solidFill>
                 <a:latin typeface="Calibri"/>
               </a:rPr>
-              <a:t>•  All classical baselines trained on telem_only features</a:t>
+              <a:t>•  True GraphSAGE message-passing GNN over the Digital Twin adjacency</a:t>
             </a:r>
           </a:p>
           <a:p>
@@ -6363,13 +6398,29 @@
               </a:spcAft>
             </a:pPr>
             <a:r>
-              <a:rPr sz="1700" b="0">
+              <a:rPr sz="1600" b="0">
                 <a:solidFill>
                   <a:srgbClr val="1A1A1A"/>
                 </a:solidFill>
                 <a:latin typeface="Calibri"/>
               </a:rPr>
-              <a:t>•  Shared temporal enrichment prevents unequal feature confounding</a:t>
+              <a:t>•  Historical GNN proxy = LightGBM on a restricted feature subset (not message passing)</a:t>
+            </a:r>
+          </a:p>
+          <a:p>
+            <a:pPr>
+              <a:spcAft>
+                <a:spcPts val="800"/>
+              </a:spcAft>
+            </a:pPr>
+            <a:r>
+              <a:rPr sz="1600" b="0">
+                <a:solidFill>
+                  <a:srgbClr val="1A1A1A"/>
+                </a:solidFill>
+                <a:latin typeface="Calibri"/>
+              </a:rPr>
+              <a:t>•  Shared temporal enrichment; classical baselines use telemetry-only feature matrices</a:t>
             </a:r>
           </a:p>
         </p:txBody>
@@ -6438,7 +6489,7 @@
                 </a:solidFill>
                 <a:latin typeface="Calibri"/>
               </a:rPr>
-              <a:t>21 / 34</a:t>
+              <a:t>21 / 35</a:t>
             </a:r>
           </a:p>
         </p:txBody>
@@ -6533,7 +6584,7 @@
                 </a:solidFill>
                 <a:latin typeface="Calibri"/>
               </a:rPr>
-              <a:t>Ablation Studies</a:t>
+              <a:t>Deep Baselines vs Selected Heads</a:t>
             </a:r>
           </a:p>
         </p:txBody>
@@ -6567,62 +6618,117 @@
                 </a:solidFill>
                 <a:latin typeface="Calibri"/>
               </a:rPr>
-              <a:t>Feature enrichment dominates; stacking is a negative result</a:t>
-            </a:r>
-          </a:p>
-        </p:txBody>
-      </p:sp>
-      <p:pic>
-        <p:nvPicPr>
-          <p:cNvPr id="5" name="Picture 4" descr="architecture_selection_t1.png"/>
-          <p:cNvPicPr>
-            <a:picLocks noChangeAspect="1"/>
-          </p:cNvPicPr>
-          <p:nvPr/>
-        </p:nvPicPr>
-        <p:blipFill>
-          <a:blip r:embed="rId2"/>
-          <a:stretch>
-            <a:fillRect/>
-          </a:stretch>
-        </p:blipFill>
-        <p:spPr>
-          <a:xfrm>
-            <a:off x="365760" y="1143000"/>
-            <a:ext cx="5669280" cy="3730918"/>
-          </a:xfrm>
-          <a:prstGeom prst="rect">
-            <a:avLst/>
-          </a:prstGeom>
-        </p:spPr>
-      </p:pic>
-      <p:pic>
-        <p:nvPicPr>
-          <p:cNvPr id="6" name="Picture 5" descr="module_contribution.png"/>
-          <p:cNvPicPr>
-            <a:picLocks noChangeAspect="1"/>
-          </p:cNvPicPr>
-          <p:nvPr/>
-        </p:nvPicPr>
-        <p:blipFill>
-          <a:blip r:embed="rId3"/>
-          <a:stretch>
-            <a:fillRect/>
-          </a:stretch>
-        </p:blipFill>
-        <p:spPr>
-          <a:xfrm>
-            <a:off x="6217920" y="1280160"/>
-            <a:ext cx="5486400" cy="4222350"/>
-          </a:xfrm>
-          <a:prstGeom prst="rect">
-            <a:avLst/>
-          </a:prstGeom>
-        </p:spPr>
-      </p:pic>
-      <p:sp>
-        <p:nvSpPr>
-          <p:cNvPr id="7" name="TextBox 6"/>
+              <a:t>TabNet and true GraphSAGE do not overturn ECN-v3 / T2 selections</a:t>
+            </a:r>
+          </a:p>
+        </p:txBody>
+      </p:sp>
+      <p:sp>
+        <p:nvSpPr>
+          <p:cNvPr id="5" name="TextBox 4"/>
+          <p:cNvSpPr txBox="1"/>
+          <p:nvPr/>
+        </p:nvSpPr>
+        <p:spPr>
+          <a:xfrm>
+            <a:off x="640080" y="1280160"/>
+            <a:ext cx="10972800" cy="5029200"/>
+          </a:xfrm>
+          <a:prstGeom prst="rect">
+            <a:avLst/>
+          </a:prstGeom>
+          <a:noFill/>
+        </p:spPr>
+        <p:txBody>
+          <a:bodyPr wrap="square">
+            <a:spAutoFit/>
+          </a:bodyPr>
+          <a:lstStyle/>
+          <a:p>
+            <a:pPr>
+              <a:spcAft>
+                <a:spcPts val="800"/>
+              </a:spcAft>
+            </a:pPr>
+            <a:r>
+              <a:rPr sz="1700" b="0">
+                <a:solidFill>
+                  <a:srgbClr val="1A1A1A"/>
+                </a:solidFill>
+                <a:latin typeface="Calibri"/>
+              </a:rPr>
+              <a:t>•  ECN-v3 final T1 AUPRC 0.115  |  RF 0.076</a:t>
+            </a:r>
+          </a:p>
+          <a:p>
+            <a:pPr>
+              <a:spcAft>
+                <a:spcPts val="800"/>
+              </a:spcAft>
+            </a:pPr>
+            <a:r>
+              <a:rPr sz="1700" b="0">
+                <a:solidFill>
+                  <a:srgbClr val="1A1A1A"/>
+                </a:solidFill>
+                <a:latin typeface="Calibri"/>
+              </a:rPr>
+              <a:t>•  TabNet T1 AUPRC 0.049 — trails ECN-v3 and RF</a:t>
+            </a:r>
+          </a:p>
+          <a:p>
+            <a:pPr>
+              <a:spcAft>
+                <a:spcPts val="800"/>
+              </a:spcAft>
+            </a:pPr>
+            <a:r>
+              <a:rPr sz="1700" b="0">
+                <a:solidFill>
+                  <a:srgbClr val="1A1A1A"/>
+                </a:solidFill>
+                <a:latin typeface="Calibri"/>
+              </a:rPr>
+              <a:t>•  True GraphSAGE T1 AUPRC 0.015 — message-passing baseline</a:t>
+            </a:r>
+          </a:p>
+          <a:p>
+            <a:pPr>
+              <a:spcAft>
+                <a:spcPts val="800"/>
+              </a:spcAft>
+            </a:pPr>
+            <a:r>
+              <a:rPr sz="1700" b="0">
+                <a:solidFill>
+                  <a:srgbClr val="1A1A1A"/>
+                </a:solidFill>
+                <a:latin typeface="Calibri"/>
+              </a:rPr>
+              <a:t>•  Historical GNN proxy (LightGBM) T1 AUPRC 0.034 — not message passing</a:t>
+            </a:r>
+          </a:p>
+          <a:p>
+            <a:pPr>
+              <a:spcAft>
+                <a:spcPts val="800"/>
+              </a:spcAft>
+            </a:pPr>
+            <a:r>
+              <a:rPr sz="1700" b="0">
+                <a:solidFill>
+                  <a:srgbClr val="1A1A1A"/>
+                </a:solidFill>
+                <a:latin typeface="Calibri"/>
+              </a:rPr>
+              <a:t>•  Recommended T2 head remains telem logistic (0.038); deep models also trail on T2</a:t>
+            </a:r>
+          </a:p>
+        </p:txBody>
+      </p:sp>
+      <p:sp>
+        <p:nvSpPr>
+          <p:cNvPr id="6" name="TextBox 5"/>
           <p:cNvSpPr txBox="1"/>
           <p:nvPr/>
         </p:nvSpPr>
@@ -6656,7 +6762,7 @@
       </p:sp>
       <p:sp>
         <p:nvSpPr>
-          <p:cNvPr id="8" name="TextBox 7"/>
+          <p:cNvPr id="7" name="TextBox 6"/>
           <p:cNvSpPr txBox="1"/>
           <p:nvPr/>
         </p:nvSpPr>
@@ -6684,7 +6790,7 @@
                 </a:solidFill>
                 <a:latin typeface="Calibri"/>
               </a:rPr>
-              <a:t>22 / 34</a:t>
+              <a:t>22 / 35</a:t>
             </a:r>
           </a:p>
         </p:txBody>
@@ -6779,7 +6885,7 @@
                 </a:solidFill>
                 <a:latin typeface="Calibri"/>
               </a:rPr>
-              <a:t>Statistical Validation</a:t>
+              <a:t>Ablation Studies</a:t>
             </a:r>
           </a:p>
         </p:txBody>
@@ -6792,104 +6898,83 @@
         </p:nvSpPr>
         <p:spPr>
           <a:xfrm>
-            <a:off x="640080" y="1280160"/>
-            <a:ext cx="10972800" cy="5029200"/>
-          </a:xfrm>
-          <a:prstGeom prst="rect">
-            <a:avLst/>
-          </a:prstGeom>
-          <a:noFill/>
-        </p:spPr>
-        <p:txBody>
-          <a:bodyPr wrap="square">
-            <a:spAutoFit/>
-          </a:bodyPr>
-          <a:lstStyle/>
-          <a:p>
-            <a:pPr>
-              <a:spcAft>
-                <a:spcPts val="800"/>
-              </a:spcAft>
-            </a:pPr>
-            <a:r>
-              <a:rPr sz="1600" b="0">
-                <a:solidFill>
-                  <a:srgbClr val="1A1A1A"/>
-                </a:solidFill>
-                <a:latin typeface="Calibri"/>
-              </a:rPr>
-              <a:t>•  Final T1 vs RF: Wilcoxon p = 0.688, Cliff δ = +0.389 (mean lift, not significant)</a:t>
-            </a:r>
-          </a:p>
-          <a:p>
-            <a:pPr>
-              <a:spcAft>
-                <a:spcPts val="800"/>
-              </a:spcAft>
-            </a:pPr>
-            <a:r>
-              <a:rPr sz="1600" b="0">
-                <a:solidFill>
-                  <a:srgbClr val="1A1A1A"/>
-                </a:solidFill>
-                <a:latin typeface="Calibri"/>
-              </a:rPr>
-              <a:t>•  Final T1 vs stacking ablation: p = 0.375, δ = +0.111</a:t>
-            </a:r>
-          </a:p>
-          <a:p>
-            <a:pPr>
-              <a:spcAft>
-                <a:spcPts val="800"/>
-              </a:spcAft>
-            </a:pPr>
-            <a:r>
-              <a:rPr sz="1600" b="0">
-                <a:solidFill>
-                  <a:srgbClr val="1A1A1A"/>
-                </a:solidFill>
-                <a:latin typeface="Calibri"/>
-              </a:rPr>
-              <a:t>•  Final T1 vs logistic: p = 0.031, δ = +0.556</a:t>
-            </a:r>
-          </a:p>
-          <a:p>
-            <a:pPr>
-              <a:spcAft>
-                <a:spcPts val="800"/>
-              </a:spcAft>
-            </a:pPr>
-            <a:r>
-              <a:rPr sz="1600" b="0">
-                <a:solidFill>
-                  <a:srgbClr val="1A1A1A"/>
-                </a:solidFill>
-                <a:latin typeface="Calibri"/>
-              </a:rPr>
-              <a:t>•  Bootstrap 95% CIs on seed means; n = 6 underpowered for many paired claims</a:t>
-            </a:r>
-          </a:p>
-          <a:p>
-            <a:pPr>
-              <a:spcAft>
-                <a:spcPts val="800"/>
-              </a:spcAft>
-            </a:pPr>
-            <a:r>
-              <a:rPr sz="1600" b="0">
-                <a:solidFill>
-                  <a:srgbClr val="1A1A1A"/>
-                </a:solidFill>
-                <a:latin typeface="Calibri"/>
-              </a:rPr>
-              <a:t>•  Do not claim universal paired superiority over RF or stacking</a:t>
-            </a:r>
-          </a:p>
-        </p:txBody>
-      </p:sp>
-      <p:sp>
-        <p:nvSpPr>
-          <p:cNvPr id="5" name="TextBox 4"/>
+            <a:off x="411480" y="621792"/>
+            <a:ext cx="11338560" cy="292608"/>
+          </a:xfrm>
+          <a:prstGeom prst="rect">
+            <a:avLst/>
+          </a:prstGeom>
+          <a:noFill/>
+        </p:spPr>
+        <p:txBody>
+          <a:bodyPr wrap="none">
+            <a:spAutoFit/>
+          </a:bodyPr>
+          <a:lstStyle/>
+          <a:p>
+            <a:r>
+              <a:rPr sz="1200" b="0">
+                <a:solidFill>
+                  <a:srgbClr val="C8D8E4"/>
+                </a:solidFill>
+                <a:latin typeface="Calibri"/>
+              </a:rPr>
+              <a:t>Feature enrichment dominates; stacking is a negative result</a:t>
+            </a:r>
+          </a:p>
+        </p:txBody>
+      </p:sp>
+      <p:pic>
+        <p:nvPicPr>
+          <p:cNvPr id="5" name="Picture 4" descr="architecture_selection_t1.png"/>
+          <p:cNvPicPr>
+            <a:picLocks noChangeAspect="1"/>
+          </p:cNvPicPr>
+          <p:nvPr/>
+        </p:nvPicPr>
+        <p:blipFill>
+          <a:blip r:embed="rId2"/>
+          <a:stretch>
+            <a:fillRect/>
+          </a:stretch>
+        </p:blipFill>
+        <p:spPr>
+          <a:xfrm>
+            <a:off x="365760" y="1143000"/>
+            <a:ext cx="5669280" cy="4241461"/>
+          </a:xfrm>
+          <a:prstGeom prst="rect">
+            <a:avLst/>
+          </a:prstGeom>
+        </p:spPr>
+      </p:pic>
+      <p:pic>
+        <p:nvPicPr>
+          <p:cNvPr id="6" name="Picture 5" descr="module_contribution.png"/>
+          <p:cNvPicPr>
+            <a:picLocks noChangeAspect="1"/>
+          </p:cNvPicPr>
+          <p:nvPr/>
+        </p:nvPicPr>
+        <p:blipFill>
+          <a:blip r:embed="rId3"/>
+          <a:stretch>
+            <a:fillRect/>
+          </a:stretch>
+        </p:blipFill>
+        <p:spPr>
+          <a:xfrm>
+            <a:off x="6217920" y="1280160"/>
+            <a:ext cx="5486400" cy="3758400"/>
+          </a:xfrm>
+          <a:prstGeom prst="rect">
+            <a:avLst/>
+          </a:prstGeom>
+        </p:spPr>
+      </p:pic>
+      <p:sp>
+        <p:nvSpPr>
+          <p:cNvPr id="7" name="TextBox 6"/>
           <p:cNvSpPr txBox="1"/>
           <p:nvPr/>
         </p:nvSpPr>
@@ -6923,7 +7008,7 @@
       </p:sp>
       <p:sp>
         <p:nvSpPr>
-          <p:cNvPr id="6" name="TextBox 5"/>
+          <p:cNvPr id="8" name="TextBox 7"/>
           <p:cNvSpPr txBox="1"/>
           <p:nvPr/>
         </p:nvSpPr>
@@ -6951,7 +7036,7 @@
                 </a:solidFill>
                 <a:latin typeface="Calibri"/>
               </a:rPr>
-              <a:t>23 / 34</a:t>
+              <a:t>23 / 35</a:t>
             </a:r>
           </a:p>
         </p:txBody>
@@ -7046,7 +7131,7 @@
                 </a:solidFill>
                 <a:latin typeface="Calibri"/>
               </a:rPr>
-              <a:t>Main Quantitative Results</a:t>
+              <a:t>Statistical Validation</a:t>
             </a:r>
           </a:p>
         </p:txBody>
@@ -7059,59 +7144,104 @@
         </p:nvSpPr>
         <p:spPr>
           <a:xfrm>
-            <a:off x="411480" y="621792"/>
-            <a:ext cx="11338560" cy="292608"/>
-          </a:xfrm>
-          <a:prstGeom prst="rect">
-            <a:avLst/>
-          </a:prstGeom>
-          <a:noFill/>
-        </p:spPr>
-        <p:txBody>
-          <a:bodyPr wrap="none">
-            <a:spAutoFit/>
-          </a:bodyPr>
-          <a:lstStyle/>
-          <a:p>
-            <a:r>
-              <a:rPr sz="1200" b="0">
-                <a:solidFill>
-                  <a:srgbClr val="C8D8E4"/>
-                </a:solidFill>
-                <a:latin typeface="Calibri"/>
-              </a:rPr>
-              <a:t>Verified six-seed means</a:t>
-            </a:r>
-          </a:p>
-        </p:txBody>
-      </p:sp>
-      <p:pic>
-        <p:nvPicPr>
-          <p:cNvPr id="5" name="Picture 4" descr="baseline_auprc_mean_ci.png"/>
-          <p:cNvPicPr>
-            <a:picLocks noChangeAspect="1"/>
-          </p:cNvPicPr>
-          <p:nvPr/>
-        </p:nvPicPr>
-        <p:blipFill>
-          <a:blip r:embed="rId2"/>
-          <a:stretch>
-            <a:fillRect/>
-          </a:stretch>
-        </p:blipFill>
-        <p:spPr>
-          <a:xfrm>
-            <a:off x="320040" y="1097280"/>
-            <a:ext cx="11521440" cy="4649909"/>
-          </a:xfrm>
-          <a:prstGeom prst="rect">
-            <a:avLst/>
-          </a:prstGeom>
-        </p:spPr>
-      </p:pic>
-      <p:sp>
-        <p:nvSpPr>
-          <p:cNvPr id="6" name="TextBox 5"/>
+            <a:off x="640080" y="1280160"/>
+            <a:ext cx="10972800" cy="5029200"/>
+          </a:xfrm>
+          <a:prstGeom prst="rect">
+            <a:avLst/>
+          </a:prstGeom>
+          <a:noFill/>
+        </p:spPr>
+        <p:txBody>
+          <a:bodyPr wrap="square">
+            <a:spAutoFit/>
+          </a:bodyPr>
+          <a:lstStyle/>
+          <a:p>
+            <a:pPr>
+              <a:spcAft>
+                <a:spcPts val="800"/>
+              </a:spcAft>
+            </a:pPr>
+            <a:r>
+              <a:rPr sz="1600" b="0">
+                <a:solidFill>
+                  <a:srgbClr val="1A1A1A"/>
+                </a:solidFill>
+                <a:latin typeface="Calibri"/>
+              </a:rPr>
+              <a:t>•  Final T1 vs RF: Wilcoxon p = 0.688, Cliff δ = +0.389 (mean lift; not statistically significant)</a:t>
+            </a:r>
+          </a:p>
+          <a:p>
+            <a:pPr>
+              <a:spcAft>
+                <a:spcPts val="800"/>
+              </a:spcAft>
+            </a:pPr>
+            <a:r>
+              <a:rPr sz="1600" b="0">
+                <a:solidFill>
+                  <a:srgbClr val="1A1A1A"/>
+                </a:solidFill>
+                <a:latin typeface="Calibri"/>
+              </a:rPr>
+              <a:t>•  Final T1 vs stacking ablation: p = 0.375, δ = +0.111 (not significant)</a:t>
+            </a:r>
+          </a:p>
+          <a:p>
+            <a:pPr>
+              <a:spcAft>
+                <a:spcPts val="800"/>
+              </a:spcAft>
+            </a:pPr>
+            <a:r>
+              <a:rPr sz="1600" b="0">
+                <a:solidFill>
+                  <a:srgbClr val="1A1A1A"/>
+                </a:solidFill>
+                <a:latin typeface="Calibri"/>
+              </a:rPr>
+              <a:t>•  Final T1 vs logistic: p = 0.031, δ = +0.556 (exploratory under multiple comparisons)</a:t>
+            </a:r>
+          </a:p>
+          <a:p>
+            <a:pPr>
+              <a:spcAft>
+                <a:spcPts val="800"/>
+              </a:spcAft>
+            </a:pPr>
+            <a:r>
+              <a:rPr sz="1600" b="0">
+                <a:solidFill>
+                  <a:srgbClr val="1A1A1A"/>
+                </a:solidFill>
+                <a:latin typeface="Calibri"/>
+              </a:rPr>
+              <a:t>•  Bootstrap 95% CIs on seed means; n = 6 underpowered for many paired claims</a:t>
+            </a:r>
+          </a:p>
+          <a:p>
+            <a:pPr>
+              <a:spcAft>
+                <a:spcPts val="800"/>
+              </a:spcAft>
+            </a:pPr>
+            <a:r>
+              <a:rPr sz="1600" b="0">
+                <a:solidFill>
+                  <a:srgbClr val="1A1A1A"/>
+                </a:solidFill>
+                <a:latin typeface="Calibri"/>
+              </a:rPr>
+              <a:t>•  Do not claim statistically significant superiority over RF or stacking</a:t>
+            </a:r>
+          </a:p>
+        </p:txBody>
+      </p:sp>
+      <p:sp>
+        <p:nvSpPr>
+          <p:cNvPr id="5" name="TextBox 4"/>
           <p:cNvSpPr txBox="1"/>
           <p:nvPr/>
         </p:nvSpPr>
@@ -7145,7 +7275,7 @@
       </p:sp>
       <p:sp>
         <p:nvSpPr>
-          <p:cNvPr id="7" name="TextBox 6"/>
+          <p:cNvPr id="6" name="TextBox 5"/>
           <p:cNvSpPr txBox="1"/>
           <p:nvPr/>
         </p:nvSpPr>
@@ -7173,7 +7303,7 @@
                 </a:solidFill>
                 <a:latin typeface="Calibri"/>
               </a:rPr>
-              <a:t>24 / 34</a:t>
+              <a:t>24 / 35</a:t>
             </a:r>
           </a:p>
         </p:txBody>
@@ -7268,66 +7398,21 @@
                 </a:solidFill>
                 <a:latin typeface="Calibri"/>
               </a:rPr>
-              <a:t>Headline Numbers (Exact Verified Means)</a:t>
-            </a:r>
-          </a:p>
-        </p:txBody>
-      </p:sp>
-      <p:sp>
-        <p:nvSpPr>
-          <p:cNvPr id="4" name="Rounded Rectangle 3"/>
-          <p:cNvSpPr/>
-          <p:nvPr/>
-        </p:nvSpPr>
-        <p:spPr>
-          <a:xfrm>
-            <a:off x="1097280" y="1234440"/>
-            <a:ext cx="9875520" cy="658368"/>
-          </a:xfrm>
-          <a:prstGeom prst="roundRect">
-            <a:avLst/>
-          </a:prstGeom>
-          <a:solidFill>
-            <a:srgbClr val="F4F7FA"/>
-          </a:solidFill>
-          <a:ln>
-            <a:solidFill>
-              <a:srgbClr val="1F7A8C"/>
-            </a:solidFill>
-          </a:ln>
-        </p:spPr>
-        <p:style>
-          <a:lnRef idx="1">
-            <a:schemeClr val="accent1"/>
-          </a:lnRef>
-          <a:fillRef idx="3">
-            <a:schemeClr val="accent1"/>
-          </a:fillRef>
-          <a:effectRef idx="2">
-            <a:schemeClr val="accent1"/>
-          </a:effectRef>
-          <a:fontRef idx="minor">
-            <a:schemeClr val="lt1"/>
-          </a:fontRef>
-        </p:style>
-        <p:txBody>
-          <a:bodyPr rtlCol="0" anchor="ctr"/>
-          <a:lstStyle/>
-          <a:p>
-            <a:pPr algn="ctr"/>
-          </a:p>
-        </p:txBody>
-      </p:sp>
-      <p:sp>
-        <p:nvSpPr>
-          <p:cNvPr id="5" name="TextBox 4"/>
-          <p:cNvSpPr txBox="1"/>
-          <p:nvPr/>
-        </p:nvSpPr>
-        <p:spPr>
-          <a:xfrm>
-            <a:off x="1325880" y="1371600"/>
-            <a:ext cx="6858000" cy="411480"/>
+              <a:t>Main Quantitative Results</a:t>
+            </a:r>
+          </a:p>
+        </p:txBody>
+      </p:sp>
+      <p:sp>
+        <p:nvSpPr>
+          <p:cNvPr id="4" name="TextBox 3"/>
+          <p:cNvSpPr txBox="1"/>
+          <p:nvPr/>
+        </p:nvSpPr>
+        <p:spPr>
+          <a:xfrm>
+            <a:off x="411480" y="621792"/>
+            <a:ext cx="11338560" cy="292608"/>
           </a:xfrm>
           <a:prstGeom prst="rect">
             <a:avLst/>
@@ -7341,625 +7426,44 @@
           <a:lstStyle/>
           <a:p>
             <a:r>
-              <a:rPr sz="1600" b="1">
-                <a:solidFill>
-                  <a:srgbClr val="0B3A5B"/>
-                </a:solidFill>
-                <a:latin typeface="Calibri"/>
-              </a:rPr>
-              <a:t>T1 ECN-v3 final (anchored)</a:t>
-            </a:r>
-          </a:p>
-        </p:txBody>
-      </p:sp>
+              <a:rPr sz="1200" b="0">
+                <a:solidFill>
+                  <a:srgbClr val="C8D8E4"/>
+                </a:solidFill>
+                <a:latin typeface="Calibri"/>
+              </a:rPr>
+              <a:t>Verified six-seed means (publication figures)</a:t>
+            </a:r>
+          </a:p>
+        </p:txBody>
+      </p:sp>
+      <p:pic>
+        <p:nvPicPr>
+          <p:cNvPr id="5" name="Picture 4" descr="baseline_auprc_mean_ci.png"/>
+          <p:cNvPicPr>
+            <a:picLocks noChangeAspect="1"/>
+          </p:cNvPicPr>
+          <p:nvPr/>
+        </p:nvPicPr>
+        <p:blipFill>
+          <a:blip r:embed="rId2"/>
+          <a:stretch>
+            <a:fillRect/>
+          </a:stretch>
+        </p:blipFill>
+        <p:spPr>
+          <a:xfrm>
+            <a:off x="320040" y="1097280"/>
+            <a:ext cx="11521440" cy="4277453"/>
+          </a:xfrm>
+          <a:prstGeom prst="rect">
+            <a:avLst/>
+          </a:prstGeom>
+        </p:spPr>
+      </p:pic>
       <p:sp>
         <p:nvSpPr>
           <p:cNvPr id="6" name="TextBox 5"/>
-          <p:cNvSpPr txBox="1"/>
-          <p:nvPr/>
-        </p:nvSpPr>
-        <p:spPr>
-          <a:xfrm>
-            <a:off x="8229600" y="1371600"/>
-            <a:ext cx="2468880" cy="411480"/>
-          </a:xfrm>
-          <a:prstGeom prst="rect">
-            <a:avLst/>
-          </a:prstGeom>
-          <a:noFill/>
-        </p:spPr>
-        <p:txBody>
-          <a:bodyPr wrap="none">
-            <a:spAutoFit/>
-          </a:bodyPr>
-          <a:lstStyle/>
-          <a:p>
-            <a:pPr algn="r"/>
-            <a:r>
-              <a:rPr sz="1800" b="1">
-                <a:solidFill>
-                  <a:srgbClr val="C47B2B"/>
-                </a:solidFill>
-                <a:latin typeface="Calibri"/>
-              </a:rPr>
-              <a:t>0.115221</a:t>
-            </a:r>
-          </a:p>
-        </p:txBody>
-      </p:sp>
-      <p:sp>
-        <p:nvSpPr>
-          <p:cNvPr id="7" name="Rounded Rectangle 6"/>
-          <p:cNvSpPr/>
-          <p:nvPr/>
-        </p:nvSpPr>
-        <p:spPr>
-          <a:xfrm>
-            <a:off x="1097280" y="2011680"/>
-            <a:ext cx="9875520" cy="658368"/>
-          </a:xfrm>
-          <a:prstGeom prst="roundRect">
-            <a:avLst/>
-          </a:prstGeom>
-          <a:solidFill>
-            <a:srgbClr val="FFFFFF"/>
-          </a:solidFill>
-          <a:ln>
-            <a:solidFill>
-              <a:srgbClr val="1F7A8C"/>
-            </a:solidFill>
-          </a:ln>
-        </p:spPr>
-        <p:style>
-          <a:lnRef idx="1">
-            <a:schemeClr val="accent1"/>
-          </a:lnRef>
-          <a:fillRef idx="3">
-            <a:schemeClr val="accent1"/>
-          </a:fillRef>
-          <a:effectRef idx="2">
-            <a:schemeClr val="accent1"/>
-          </a:effectRef>
-          <a:fontRef idx="minor">
-            <a:schemeClr val="lt1"/>
-          </a:fontRef>
-        </p:style>
-        <p:txBody>
-          <a:bodyPr rtlCol="0" anchor="ctr"/>
-          <a:lstStyle/>
-          <a:p>
-            <a:pPr algn="ctr"/>
-          </a:p>
-        </p:txBody>
-      </p:sp>
-      <p:sp>
-        <p:nvSpPr>
-          <p:cNvPr id="8" name="TextBox 7"/>
-          <p:cNvSpPr txBox="1"/>
-          <p:nvPr/>
-        </p:nvSpPr>
-        <p:spPr>
-          <a:xfrm>
-            <a:off x="1325880" y="2148840"/>
-            <a:ext cx="6858000" cy="411480"/>
-          </a:xfrm>
-          <a:prstGeom prst="rect">
-            <a:avLst/>
-          </a:prstGeom>
-          <a:noFill/>
-        </p:spPr>
-        <p:txBody>
-          <a:bodyPr wrap="none">
-            <a:spAutoFit/>
-          </a:bodyPr>
-          <a:lstStyle/>
-          <a:p>
-            <a:r>
-              <a:rPr sz="1600" b="1">
-                <a:solidFill>
-                  <a:srgbClr val="0B3A5B"/>
-                </a:solidFill>
-                <a:latin typeface="Calibri"/>
-              </a:rPr>
-              <a:t>T1 RF telem_only</a:t>
-            </a:r>
-          </a:p>
-        </p:txBody>
-      </p:sp>
-      <p:sp>
-        <p:nvSpPr>
-          <p:cNvPr id="9" name="TextBox 8"/>
-          <p:cNvSpPr txBox="1"/>
-          <p:nvPr/>
-        </p:nvSpPr>
-        <p:spPr>
-          <a:xfrm>
-            <a:off x="8229600" y="2148840"/>
-            <a:ext cx="2468880" cy="411480"/>
-          </a:xfrm>
-          <a:prstGeom prst="rect">
-            <a:avLst/>
-          </a:prstGeom>
-          <a:noFill/>
-        </p:spPr>
-        <p:txBody>
-          <a:bodyPr wrap="none">
-            <a:spAutoFit/>
-          </a:bodyPr>
-          <a:lstStyle/>
-          <a:p>
-            <a:pPr algn="r"/>
-            <a:r>
-              <a:rPr sz="1800" b="1">
-                <a:solidFill>
-                  <a:srgbClr val="C47B2B"/>
-                </a:solidFill>
-                <a:latin typeface="Calibri"/>
-              </a:rPr>
-              <a:t>0.075838</a:t>
-            </a:r>
-          </a:p>
-        </p:txBody>
-      </p:sp>
-      <p:sp>
-        <p:nvSpPr>
-          <p:cNvPr id="10" name="Rounded Rectangle 9"/>
-          <p:cNvSpPr/>
-          <p:nvPr/>
-        </p:nvSpPr>
-        <p:spPr>
-          <a:xfrm>
-            <a:off x="1097280" y="2788920"/>
-            <a:ext cx="9875520" cy="658368"/>
-          </a:xfrm>
-          <a:prstGeom prst="roundRect">
-            <a:avLst/>
-          </a:prstGeom>
-          <a:solidFill>
-            <a:srgbClr val="F4F7FA"/>
-          </a:solidFill>
-          <a:ln>
-            <a:solidFill>
-              <a:srgbClr val="1F7A8C"/>
-            </a:solidFill>
-          </a:ln>
-        </p:spPr>
-        <p:style>
-          <a:lnRef idx="1">
-            <a:schemeClr val="accent1"/>
-          </a:lnRef>
-          <a:fillRef idx="3">
-            <a:schemeClr val="accent1"/>
-          </a:fillRef>
-          <a:effectRef idx="2">
-            <a:schemeClr val="accent1"/>
-          </a:effectRef>
-          <a:fontRef idx="minor">
-            <a:schemeClr val="lt1"/>
-          </a:fontRef>
-        </p:style>
-        <p:txBody>
-          <a:bodyPr rtlCol="0" anchor="ctr"/>
-          <a:lstStyle/>
-          <a:p>
-            <a:pPr algn="ctr"/>
-          </a:p>
-        </p:txBody>
-      </p:sp>
-      <p:sp>
-        <p:nvSpPr>
-          <p:cNvPr id="11" name="TextBox 10"/>
-          <p:cNvSpPr txBox="1"/>
-          <p:nvPr/>
-        </p:nvSpPr>
-        <p:spPr>
-          <a:xfrm>
-            <a:off x="1325880" y="2926079"/>
-            <a:ext cx="6858000" cy="411480"/>
-          </a:xfrm>
-          <a:prstGeom prst="rect">
-            <a:avLst/>
-          </a:prstGeom>
-          <a:noFill/>
-        </p:spPr>
-        <p:txBody>
-          <a:bodyPr wrap="none">
-            <a:spAutoFit/>
-          </a:bodyPr>
-          <a:lstStyle/>
-          <a:p>
-            <a:r>
-              <a:rPr sz="1600" b="1">
-                <a:solidFill>
-                  <a:srgbClr val="0B3A5B"/>
-                </a:solidFill>
-                <a:latin typeface="Calibri"/>
-              </a:rPr>
-              <a:t>T1 v2 legacy+anchored</a:t>
-            </a:r>
-          </a:p>
-        </p:txBody>
-      </p:sp>
-      <p:sp>
-        <p:nvSpPr>
-          <p:cNvPr id="12" name="TextBox 11"/>
-          <p:cNvSpPr txBox="1"/>
-          <p:nvPr/>
-        </p:nvSpPr>
-        <p:spPr>
-          <a:xfrm>
-            <a:off x="8229600" y="2926079"/>
-            <a:ext cx="2468880" cy="411480"/>
-          </a:xfrm>
-          <a:prstGeom prst="rect">
-            <a:avLst/>
-          </a:prstGeom>
-          <a:noFill/>
-        </p:spPr>
-        <p:txBody>
-          <a:bodyPr wrap="none">
-            <a:spAutoFit/>
-          </a:bodyPr>
-          <a:lstStyle/>
-          <a:p>
-            <a:pPr algn="r"/>
-            <a:r>
-              <a:rPr sz="1800" b="1">
-                <a:solidFill>
-                  <a:srgbClr val="C47B2B"/>
-                </a:solidFill>
-                <a:latin typeface="Calibri"/>
-              </a:rPr>
-              <a:t>0.057713</a:t>
-            </a:r>
-          </a:p>
-        </p:txBody>
-      </p:sp>
-      <p:sp>
-        <p:nvSpPr>
-          <p:cNvPr id="13" name="Rounded Rectangle 12"/>
-          <p:cNvSpPr/>
-          <p:nvPr/>
-        </p:nvSpPr>
-        <p:spPr>
-          <a:xfrm>
-            <a:off x="1097280" y="3566160"/>
-            <a:ext cx="9875520" cy="658368"/>
-          </a:xfrm>
-          <a:prstGeom prst="roundRect">
-            <a:avLst/>
-          </a:prstGeom>
-          <a:solidFill>
-            <a:srgbClr val="FFFFFF"/>
-          </a:solidFill>
-          <a:ln>
-            <a:solidFill>
-              <a:srgbClr val="1F7A8C"/>
-            </a:solidFill>
-          </a:ln>
-        </p:spPr>
-        <p:style>
-          <a:lnRef idx="1">
-            <a:schemeClr val="accent1"/>
-          </a:lnRef>
-          <a:fillRef idx="3">
-            <a:schemeClr val="accent1"/>
-          </a:fillRef>
-          <a:effectRef idx="2">
-            <a:schemeClr val="accent1"/>
-          </a:effectRef>
-          <a:fontRef idx="minor">
-            <a:schemeClr val="lt1"/>
-          </a:fontRef>
-        </p:style>
-        <p:txBody>
-          <a:bodyPr rtlCol="0" anchor="ctr"/>
-          <a:lstStyle/>
-          <a:p>
-            <a:pPr algn="ctr"/>
-          </a:p>
-        </p:txBody>
-      </p:sp>
-      <p:sp>
-        <p:nvSpPr>
-          <p:cNvPr id="14" name="TextBox 13"/>
-          <p:cNvSpPr txBox="1"/>
-          <p:nvPr/>
-        </p:nvSpPr>
-        <p:spPr>
-          <a:xfrm>
-            <a:off x="1325880" y="3703320"/>
-            <a:ext cx="6858000" cy="411480"/>
-          </a:xfrm>
-          <a:prstGeom prst="rect">
-            <a:avLst/>
-          </a:prstGeom>
-          <a:noFill/>
-        </p:spPr>
-        <p:txBody>
-          <a:bodyPr wrap="none">
-            <a:spAutoFit/>
-          </a:bodyPr>
-          <a:lstStyle/>
-          <a:p>
-            <a:r>
-              <a:rPr sz="1600" b="1">
-                <a:solidFill>
-                  <a:srgbClr val="0B3A5B"/>
-                </a:solidFill>
-                <a:latin typeface="Calibri"/>
-              </a:rPr>
-              <a:t>T1 stacking ablation</a:t>
-            </a:r>
-          </a:p>
-        </p:txBody>
-      </p:sp>
-      <p:sp>
-        <p:nvSpPr>
-          <p:cNvPr id="15" name="TextBox 14"/>
-          <p:cNvSpPr txBox="1"/>
-          <p:nvPr/>
-        </p:nvSpPr>
-        <p:spPr>
-          <a:xfrm>
-            <a:off x="8229600" y="3703320"/>
-            <a:ext cx="2468880" cy="411480"/>
-          </a:xfrm>
-          <a:prstGeom prst="rect">
-            <a:avLst/>
-          </a:prstGeom>
-          <a:noFill/>
-        </p:spPr>
-        <p:txBody>
-          <a:bodyPr wrap="none">
-            <a:spAutoFit/>
-          </a:bodyPr>
-          <a:lstStyle/>
-          <a:p>
-            <a:pPr algn="r"/>
-            <a:r>
-              <a:rPr sz="1800" b="1">
-                <a:solidFill>
-                  <a:srgbClr val="C47B2B"/>
-                </a:solidFill>
-                <a:latin typeface="Calibri"/>
-              </a:rPr>
-              <a:t>0.099746</a:t>
-            </a:r>
-          </a:p>
-        </p:txBody>
-      </p:sp>
-      <p:sp>
-        <p:nvSpPr>
-          <p:cNvPr id="16" name="Rounded Rectangle 15"/>
-          <p:cNvSpPr/>
-          <p:nvPr/>
-        </p:nvSpPr>
-        <p:spPr>
-          <a:xfrm>
-            <a:off x="1097280" y="4343400"/>
-            <a:ext cx="9875520" cy="658368"/>
-          </a:xfrm>
-          <a:prstGeom prst="roundRect">
-            <a:avLst/>
-          </a:prstGeom>
-          <a:solidFill>
-            <a:srgbClr val="F4F7FA"/>
-          </a:solidFill>
-          <a:ln>
-            <a:solidFill>
-              <a:srgbClr val="1F7A8C"/>
-            </a:solidFill>
-          </a:ln>
-        </p:spPr>
-        <p:style>
-          <a:lnRef idx="1">
-            <a:schemeClr val="accent1"/>
-          </a:lnRef>
-          <a:fillRef idx="3">
-            <a:schemeClr val="accent1"/>
-          </a:fillRef>
-          <a:effectRef idx="2">
-            <a:schemeClr val="accent1"/>
-          </a:effectRef>
-          <a:fontRef idx="minor">
-            <a:schemeClr val="lt1"/>
-          </a:fontRef>
-        </p:style>
-        <p:txBody>
-          <a:bodyPr rtlCol="0" anchor="ctr"/>
-          <a:lstStyle/>
-          <a:p>
-            <a:pPr algn="ctr"/>
-          </a:p>
-        </p:txBody>
-      </p:sp>
-      <p:sp>
-        <p:nvSpPr>
-          <p:cNvPr id="17" name="TextBox 16"/>
-          <p:cNvSpPr txBox="1"/>
-          <p:nvPr/>
-        </p:nvSpPr>
-        <p:spPr>
-          <a:xfrm>
-            <a:off x="1325880" y="4480560"/>
-            <a:ext cx="6858000" cy="411480"/>
-          </a:xfrm>
-          <a:prstGeom prst="rect">
-            <a:avLst/>
-          </a:prstGeom>
-          <a:noFill/>
-        </p:spPr>
-        <p:txBody>
-          <a:bodyPr wrap="none">
-            <a:spAutoFit/>
-          </a:bodyPr>
-          <a:lstStyle/>
-          <a:p>
-            <a:r>
-              <a:rPr sz="1600" b="1">
-                <a:solidFill>
-                  <a:srgbClr val="0B3A5B"/>
-                </a:solidFill>
-                <a:latin typeface="Calibri"/>
-              </a:rPr>
-              <a:t>T2 telem logistic (recommended)</a:t>
-            </a:r>
-          </a:p>
-        </p:txBody>
-      </p:sp>
-      <p:sp>
-        <p:nvSpPr>
-          <p:cNvPr id="18" name="TextBox 17"/>
-          <p:cNvSpPr txBox="1"/>
-          <p:nvPr/>
-        </p:nvSpPr>
-        <p:spPr>
-          <a:xfrm>
-            <a:off x="8229600" y="4480560"/>
-            <a:ext cx="2468880" cy="411480"/>
-          </a:xfrm>
-          <a:prstGeom prst="rect">
-            <a:avLst/>
-          </a:prstGeom>
-          <a:noFill/>
-        </p:spPr>
-        <p:txBody>
-          <a:bodyPr wrap="none">
-            <a:spAutoFit/>
-          </a:bodyPr>
-          <a:lstStyle/>
-          <a:p>
-            <a:pPr algn="r"/>
-            <a:r>
-              <a:rPr sz="1800" b="1">
-                <a:solidFill>
-                  <a:srgbClr val="C47B2B"/>
-                </a:solidFill>
-                <a:latin typeface="Calibri"/>
-              </a:rPr>
-              <a:t>0.038043</a:t>
-            </a:r>
-          </a:p>
-        </p:txBody>
-      </p:sp>
-      <p:sp>
-        <p:nvSpPr>
-          <p:cNvPr id="19" name="Rounded Rectangle 18"/>
-          <p:cNvSpPr/>
-          <p:nvPr/>
-        </p:nvSpPr>
-        <p:spPr>
-          <a:xfrm>
-            <a:off x="1097280" y="5120640"/>
-            <a:ext cx="9875520" cy="658368"/>
-          </a:xfrm>
-          <a:prstGeom prst="roundRect">
-            <a:avLst/>
-          </a:prstGeom>
-          <a:solidFill>
-            <a:srgbClr val="FFFFFF"/>
-          </a:solidFill>
-          <a:ln>
-            <a:solidFill>
-              <a:srgbClr val="1F7A8C"/>
-            </a:solidFill>
-          </a:ln>
-        </p:spPr>
-        <p:style>
-          <a:lnRef idx="1">
-            <a:schemeClr val="accent1"/>
-          </a:lnRef>
-          <a:fillRef idx="3">
-            <a:schemeClr val="accent1"/>
-          </a:fillRef>
-          <a:effectRef idx="2">
-            <a:schemeClr val="accent1"/>
-          </a:effectRef>
-          <a:fontRef idx="minor">
-            <a:schemeClr val="lt1"/>
-          </a:fontRef>
-        </p:style>
-        <p:txBody>
-          <a:bodyPr rtlCol="0" anchor="ctr"/>
-          <a:lstStyle/>
-          <a:p>
-            <a:pPr algn="ctr"/>
-          </a:p>
-        </p:txBody>
-      </p:sp>
-      <p:sp>
-        <p:nvSpPr>
-          <p:cNvPr id="20" name="TextBox 19"/>
-          <p:cNvSpPr txBox="1"/>
-          <p:nvPr/>
-        </p:nvSpPr>
-        <p:spPr>
-          <a:xfrm>
-            <a:off x="1325880" y="5257800"/>
-            <a:ext cx="6858000" cy="411480"/>
-          </a:xfrm>
-          <a:prstGeom prst="rect">
-            <a:avLst/>
-          </a:prstGeom>
-          <a:noFill/>
-        </p:spPr>
-        <p:txBody>
-          <a:bodyPr wrap="none">
-            <a:spAutoFit/>
-          </a:bodyPr>
-          <a:lstStyle/>
-          <a:p>
-            <a:r>
-              <a:rPr sz="1600" b="1">
-                <a:solidFill>
-                  <a:srgbClr val="0B3A5B"/>
-                </a:solidFill>
-                <a:latin typeface="Calibri"/>
-              </a:rPr>
-              <a:t>Twin gain (final T1)</a:t>
-            </a:r>
-          </a:p>
-        </p:txBody>
-      </p:sp>
-      <p:sp>
-        <p:nvSpPr>
-          <p:cNvPr id="21" name="TextBox 20"/>
-          <p:cNvSpPr txBox="1"/>
-          <p:nvPr/>
-        </p:nvSpPr>
-        <p:spPr>
-          <a:xfrm>
-            <a:off x="8229600" y="5257800"/>
-            <a:ext cx="2468880" cy="411480"/>
-          </a:xfrm>
-          <a:prstGeom prst="rect">
-            <a:avLst/>
-          </a:prstGeom>
-          <a:noFill/>
-        </p:spPr>
-        <p:txBody>
-          <a:bodyPr wrap="none">
-            <a:spAutoFit/>
-          </a:bodyPr>
-          <a:lstStyle/>
-          <a:p>
-            <a:pPr algn="r"/>
-            <a:r>
-              <a:rPr sz="1800" b="1">
-                <a:solidFill>
-                  <a:srgbClr val="C47B2B"/>
-                </a:solidFill>
-                <a:latin typeface="Calibri"/>
-              </a:rPr>
-              <a:t>+0.000347</a:t>
-            </a:r>
-          </a:p>
-        </p:txBody>
-      </p:sp>
-      <p:sp>
-        <p:nvSpPr>
-          <p:cNvPr id="22" name="TextBox 21"/>
           <p:cNvSpPr txBox="1"/>
           <p:nvPr/>
         </p:nvSpPr>
@@ -7993,7 +7497,7 @@
       </p:sp>
       <p:sp>
         <p:nvSpPr>
-          <p:cNvPr id="23" name="TextBox 22"/>
+          <p:cNvPr id="7" name="TextBox 6"/>
           <p:cNvSpPr txBox="1"/>
           <p:nvPr/>
         </p:nvSpPr>
@@ -8021,7 +7525,7 @@
                 </a:solidFill>
                 <a:latin typeface="Calibri"/>
               </a:rPr>
-              <a:t>25 / 34</a:t>
+              <a:t>25 / 35</a:t>
             </a:r>
           </a:p>
         </p:txBody>
@@ -8116,38 +7620,732 @@
                 </a:solidFill>
                 <a:latin typeface="Calibri"/>
               </a:rPr>
-              <a:t>T1 ROC / Precision–Recall (Primary Instance)</a:t>
-            </a:r>
-          </a:p>
-        </p:txBody>
-      </p:sp>
-      <p:pic>
-        <p:nvPicPr>
-          <p:cNvPr id="4" name="Picture 3" descr="T1_v1.1.0-INST_roc_pr.png"/>
-          <p:cNvPicPr>
-            <a:picLocks noChangeAspect="1"/>
-          </p:cNvPicPr>
-          <p:nvPr/>
-        </p:nvPicPr>
-        <p:blipFill>
-          <a:blip r:embed="rId2"/>
-          <a:stretch>
-            <a:fillRect/>
-          </a:stretch>
-        </p:blipFill>
-        <p:spPr>
-          <a:xfrm>
-            <a:off x="731520" y="1143000"/>
-            <a:ext cx="10698480" cy="4555499"/>
-          </a:xfrm>
-          <a:prstGeom prst="rect">
-            <a:avLst/>
-          </a:prstGeom>
-        </p:spPr>
-      </p:pic>
-      <p:sp>
-        <p:nvSpPr>
-          <p:cNvPr id="5" name="TextBox 4"/>
+              <a:t>Headline Numbers</a:t>
+            </a:r>
+          </a:p>
+        </p:txBody>
+      </p:sp>
+      <p:sp>
+        <p:nvSpPr>
+          <p:cNvPr id="4" name="TextBox 3"/>
+          <p:cNvSpPr txBox="1"/>
+          <p:nvPr/>
+        </p:nvSpPr>
+        <p:spPr>
+          <a:xfrm>
+            <a:off x="411480" y="621792"/>
+            <a:ext cx="11338560" cy="292608"/>
+          </a:xfrm>
+          <a:prstGeom prst="rect">
+            <a:avLst/>
+          </a:prstGeom>
+          <a:noFill/>
+        </p:spPr>
+        <p:txBody>
+          <a:bodyPr wrap="none">
+            <a:spAutoFit/>
+          </a:bodyPr>
+          <a:lstStyle/>
+          <a:p>
+            <a:r>
+              <a:rPr sz="1200" b="0">
+                <a:solidFill>
+                  <a:srgbClr val="C8D8E4"/>
+                </a:solidFill>
+                <a:latin typeface="Calibri"/>
+              </a:rPr>
+              <a:t>Three-decimal manuscript convention; RF paired comparison non-significant</a:t>
+            </a:r>
+          </a:p>
+        </p:txBody>
+      </p:sp>
+      <p:sp>
+        <p:nvSpPr>
+          <p:cNvPr id="5" name="Rounded Rectangle 4"/>
+          <p:cNvSpPr/>
+          <p:nvPr/>
+        </p:nvSpPr>
+        <p:spPr>
+          <a:xfrm>
+            <a:off x="1097280" y="1234440"/>
+            <a:ext cx="9875520" cy="658368"/>
+          </a:xfrm>
+          <a:prstGeom prst="roundRect">
+            <a:avLst/>
+          </a:prstGeom>
+          <a:solidFill>
+            <a:srgbClr val="F4F7FA"/>
+          </a:solidFill>
+          <a:ln>
+            <a:solidFill>
+              <a:srgbClr val="1F7A8C"/>
+            </a:solidFill>
+          </a:ln>
+        </p:spPr>
+        <p:style>
+          <a:lnRef idx="1">
+            <a:schemeClr val="accent1"/>
+          </a:lnRef>
+          <a:fillRef idx="3">
+            <a:schemeClr val="accent1"/>
+          </a:fillRef>
+          <a:effectRef idx="2">
+            <a:schemeClr val="accent1"/>
+          </a:effectRef>
+          <a:fontRef idx="minor">
+            <a:schemeClr val="lt1"/>
+          </a:fontRef>
+        </p:style>
+        <p:txBody>
+          <a:bodyPr rtlCol="0" anchor="ctr"/>
+          <a:lstStyle/>
+          <a:p>
+            <a:pPr algn="ctr"/>
+          </a:p>
+        </p:txBody>
+      </p:sp>
+      <p:sp>
+        <p:nvSpPr>
+          <p:cNvPr id="6" name="TextBox 5"/>
+          <p:cNvSpPr txBox="1"/>
+          <p:nvPr/>
+        </p:nvSpPr>
+        <p:spPr>
+          <a:xfrm>
+            <a:off x="1325880" y="1371600"/>
+            <a:ext cx="6858000" cy="411480"/>
+          </a:xfrm>
+          <a:prstGeom prst="rect">
+            <a:avLst/>
+          </a:prstGeom>
+          <a:noFill/>
+        </p:spPr>
+        <p:txBody>
+          <a:bodyPr wrap="none">
+            <a:spAutoFit/>
+          </a:bodyPr>
+          <a:lstStyle/>
+          <a:p>
+            <a:r>
+              <a:rPr sz="1600" b="1">
+                <a:solidFill>
+                  <a:srgbClr val="0B3A5B"/>
+                </a:solidFill>
+                <a:latin typeface="Calibri"/>
+              </a:rPr>
+              <a:t>T1 ECN-v3 final (anchored)</a:t>
+            </a:r>
+          </a:p>
+        </p:txBody>
+      </p:sp>
+      <p:sp>
+        <p:nvSpPr>
+          <p:cNvPr id="7" name="TextBox 6"/>
+          <p:cNvSpPr txBox="1"/>
+          <p:nvPr/>
+        </p:nvSpPr>
+        <p:spPr>
+          <a:xfrm>
+            <a:off x="8229600" y="1371600"/>
+            <a:ext cx="2468880" cy="411480"/>
+          </a:xfrm>
+          <a:prstGeom prst="rect">
+            <a:avLst/>
+          </a:prstGeom>
+          <a:noFill/>
+        </p:spPr>
+        <p:txBody>
+          <a:bodyPr wrap="none">
+            <a:spAutoFit/>
+          </a:bodyPr>
+          <a:lstStyle/>
+          <a:p>
+            <a:pPr algn="r"/>
+            <a:r>
+              <a:rPr sz="1800" b="1">
+                <a:solidFill>
+                  <a:srgbClr val="C47B2B"/>
+                </a:solidFill>
+                <a:latin typeface="Calibri"/>
+              </a:rPr>
+              <a:t>0.115</a:t>
+            </a:r>
+          </a:p>
+        </p:txBody>
+      </p:sp>
+      <p:sp>
+        <p:nvSpPr>
+          <p:cNvPr id="8" name="Rounded Rectangle 7"/>
+          <p:cNvSpPr/>
+          <p:nvPr/>
+        </p:nvSpPr>
+        <p:spPr>
+          <a:xfrm>
+            <a:off x="1097280" y="2011680"/>
+            <a:ext cx="9875520" cy="658368"/>
+          </a:xfrm>
+          <a:prstGeom prst="roundRect">
+            <a:avLst/>
+          </a:prstGeom>
+          <a:solidFill>
+            <a:srgbClr val="FFFFFF"/>
+          </a:solidFill>
+          <a:ln>
+            <a:solidFill>
+              <a:srgbClr val="1F7A8C"/>
+            </a:solidFill>
+          </a:ln>
+        </p:spPr>
+        <p:style>
+          <a:lnRef idx="1">
+            <a:schemeClr val="accent1"/>
+          </a:lnRef>
+          <a:fillRef idx="3">
+            <a:schemeClr val="accent1"/>
+          </a:fillRef>
+          <a:effectRef idx="2">
+            <a:schemeClr val="accent1"/>
+          </a:effectRef>
+          <a:fontRef idx="minor">
+            <a:schemeClr val="lt1"/>
+          </a:fontRef>
+        </p:style>
+        <p:txBody>
+          <a:bodyPr rtlCol="0" anchor="ctr"/>
+          <a:lstStyle/>
+          <a:p>
+            <a:pPr algn="ctr"/>
+          </a:p>
+        </p:txBody>
+      </p:sp>
+      <p:sp>
+        <p:nvSpPr>
+          <p:cNvPr id="9" name="TextBox 8"/>
+          <p:cNvSpPr txBox="1"/>
+          <p:nvPr/>
+        </p:nvSpPr>
+        <p:spPr>
+          <a:xfrm>
+            <a:off x="1325880" y="2148840"/>
+            <a:ext cx="6858000" cy="411480"/>
+          </a:xfrm>
+          <a:prstGeom prst="rect">
+            <a:avLst/>
+          </a:prstGeom>
+          <a:noFill/>
+        </p:spPr>
+        <p:txBody>
+          <a:bodyPr wrap="none">
+            <a:spAutoFit/>
+          </a:bodyPr>
+          <a:lstStyle/>
+          <a:p>
+            <a:r>
+              <a:rPr sz="1600" b="1">
+                <a:solidFill>
+                  <a:srgbClr val="0B3A5B"/>
+                </a:solidFill>
+                <a:latin typeface="Calibri"/>
+              </a:rPr>
+              <a:t>T1 RF telem_only</a:t>
+            </a:r>
+          </a:p>
+        </p:txBody>
+      </p:sp>
+      <p:sp>
+        <p:nvSpPr>
+          <p:cNvPr id="10" name="TextBox 9"/>
+          <p:cNvSpPr txBox="1"/>
+          <p:nvPr/>
+        </p:nvSpPr>
+        <p:spPr>
+          <a:xfrm>
+            <a:off x="8229600" y="2148840"/>
+            <a:ext cx="2468880" cy="411480"/>
+          </a:xfrm>
+          <a:prstGeom prst="rect">
+            <a:avLst/>
+          </a:prstGeom>
+          <a:noFill/>
+        </p:spPr>
+        <p:txBody>
+          <a:bodyPr wrap="none">
+            <a:spAutoFit/>
+          </a:bodyPr>
+          <a:lstStyle/>
+          <a:p>
+            <a:pPr algn="r"/>
+            <a:r>
+              <a:rPr sz="1800" b="1">
+                <a:solidFill>
+                  <a:srgbClr val="C47B2B"/>
+                </a:solidFill>
+                <a:latin typeface="Calibri"/>
+              </a:rPr>
+              <a:t>0.076</a:t>
+            </a:r>
+          </a:p>
+        </p:txBody>
+      </p:sp>
+      <p:sp>
+        <p:nvSpPr>
+          <p:cNvPr id="11" name="Rounded Rectangle 10"/>
+          <p:cNvSpPr/>
+          <p:nvPr/>
+        </p:nvSpPr>
+        <p:spPr>
+          <a:xfrm>
+            <a:off x="1097280" y="2788920"/>
+            <a:ext cx="9875520" cy="658368"/>
+          </a:xfrm>
+          <a:prstGeom prst="roundRect">
+            <a:avLst/>
+          </a:prstGeom>
+          <a:solidFill>
+            <a:srgbClr val="F4F7FA"/>
+          </a:solidFill>
+          <a:ln>
+            <a:solidFill>
+              <a:srgbClr val="1F7A8C"/>
+            </a:solidFill>
+          </a:ln>
+        </p:spPr>
+        <p:style>
+          <a:lnRef idx="1">
+            <a:schemeClr val="accent1"/>
+          </a:lnRef>
+          <a:fillRef idx="3">
+            <a:schemeClr val="accent1"/>
+          </a:fillRef>
+          <a:effectRef idx="2">
+            <a:schemeClr val="accent1"/>
+          </a:effectRef>
+          <a:fontRef idx="minor">
+            <a:schemeClr val="lt1"/>
+          </a:fontRef>
+        </p:style>
+        <p:txBody>
+          <a:bodyPr rtlCol="0" anchor="ctr"/>
+          <a:lstStyle/>
+          <a:p>
+            <a:pPr algn="ctr"/>
+          </a:p>
+        </p:txBody>
+      </p:sp>
+      <p:sp>
+        <p:nvSpPr>
+          <p:cNvPr id="12" name="TextBox 11"/>
+          <p:cNvSpPr txBox="1"/>
+          <p:nvPr/>
+        </p:nvSpPr>
+        <p:spPr>
+          <a:xfrm>
+            <a:off x="1325880" y="2926079"/>
+            <a:ext cx="6858000" cy="411480"/>
+          </a:xfrm>
+          <a:prstGeom prst="rect">
+            <a:avLst/>
+          </a:prstGeom>
+          <a:noFill/>
+        </p:spPr>
+        <p:txBody>
+          <a:bodyPr wrap="none">
+            <a:spAutoFit/>
+          </a:bodyPr>
+          <a:lstStyle/>
+          <a:p>
+            <a:r>
+              <a:rPr sz="1600" b="1">
+                <a:solidFill>
+                  <a:srgbClr val="0B3A5B"/>
+                </a:solidFill>
+                <a:latin typeface="Calibri"/>
+              </a:rPr>
+              <a:t>T1 v2 legacy + anchored</a:t>
+            </a:r>
+          </a:p>
+        </p:txBody>
+      </p:sp>
+      <p:sp>
+        <p:nvSpPr>
+          <p:cNvPr id="13" name="TextBox 12"/>
+          <p:cNvSpPr txBox="1"/>
+          <p:nvPr/>
+        </p:nvSpPr>
+        <p:spPr>
+          <a:xfrm>
+            <a:off x="8229600" y="2926079"/>
+            <a:ext cx="2468880" cy="411480"/>
+          </a:xfrm>
+          <a:prstGeom prst="rect">
+            <a:avLst/>
+          </a:prstGeom>
+          <a:noFill/>
+        </p:spPr>
+        <p:txBody>
+          <a:bodyPr wrap="none">
+            <a:spAutoFit/>
+          </a:bodyPr>
+          <a:lstStyle/>
+          <a:p>
+            <a:pPr algn="r"/>
+            <a:r>
+              <a:rPr sz="1800" b="1">
+                <a:solidFill>
+                  <a:srgbClr val="C47B2B"/>
+                </a:solidFill>
+                <a:latin typeface="Calibri"/>
+              </a:rPr>
+              <a:t>0.058</a:t>
+            </a:r>
+          </a:p>
+        </p:txBody>
+      </p:sp>
+      <p:sp>
+        <p:nvSpPr>
+          <p:cNvPr id="14" name="Rounded Rectangle 13"/>
+          <p:cNvSpPr/>
+          <p:nvPr/>
+        </p:nvSpPr>
+        <p:spPr>
+          <a:xfrm>
+            <a:off x="1097280" y="3566160"/>
+            <a:ext cx="9875520" cy="658368"/>
+          </a:xfrm>
+          <a:prstGeom prst="roundRect">
+            <a:avLst/>
+          </a:prstGeom>
+          <a:solidFill>
+            <a:srgbClr val="FFFFFF"/>
+          </a:solidFill>
+          <a:ln>
+            <a:solidFill>
+              <a:srgbClr val="1F7A8C"/>
+            </a:solidFill>
+          </a:ln>
+        </p:spPr>
+        <p:style>
+          <a:lnRef idx="1">
+            <a:schemeClr val="accent1"/>
+          </a:lnRef>
+          <a:fillRef idx="3">
+            <a:schemeClr val="accent1"/>
+          </a:fillRef>
+          <a:effectRef idx="2">
+            <a:schemeClr val="accent1"/>
+          </a:effectRef>
+          <a:fontRef idx="minor">
+            <a:schemeClr val="lt1"/>
+          </a:fontRef>
+        </p:style>
+        <p:txBody>
+          <a:bodyPr rtlCol="0" anchor="ctr"/>
+          <a:lstStyle/>
+          <a:p>
+            <a:pPr algn="ctr"/>
+          </a:p>
+        </p:txBody>
+      </p:sp>
+      <p:sp>
+        <p:nvSpPr>
+          <p:cNvPr id="15" name="TextBox 14"/>
+          <p:cNvSpPr txBox="1"/>
+          <p:nvPr/>
+        </p:nvSpPr>
+        <p:spPr>
+          <a:xfrm>
+            <a:off x="1325880" y="3703320"/>
+            <a:ext cx="6858000" cy="411480"/>
+          </a:xfrm>
+          <a:prstGeom prst="rect">
+            <a:avLst/>
+          </a:prstGeom>
+          <a:noFill/>
+        </p:spPr>
+        <p:txBody>
+          <a:bodyPr wrap="none">
+            <a:spAutoFit/>
+          </a:bodyPr>
+          <a:lstStyle/>
+          <a:p>
+            <a:r>
+              <a:rPr sz="1600" b="1">
+                <a:solidFill>
+                  <a:srgbClr val="0B3A5B"/>
+                </a:solidFill>
+                <a:latin typeface="Calibri"/>
+              </a:rPr>
+              <a:t>T1 stacking ablation (negative)</a:t>
+            </a:r>
+          </a:p>
+        </p:txBody>
+      </p:sp>
+      <p:sp>
+        <p:nvSpPr>
+          <p:cNvPr id="16" name="TextBox 15"/>
+          <p:cNvSpPr txBox="1"/>
+          <p:nvPr/>
+        </p:nvSpPr>
+        <p:spPr>
+          <a:xfrm>
+            <a:off x="8229600" y="3703320"/>
+            <a:ext cx="2468880" cy="411480"/>
+          </a:xfrm>
+          <a:prstGeom prst="rect">
+            <a:avLst/>
+          </a:prstGeom>
+          <a:noFill/>
+        </p:spPr>
+        <p:txBody>
+          <a:bodyPr wrap="none">
+            <a:spAutoFit/>
+          </a:bodyPr>
+          <a:lstStyle/>
+          <a:p>
+            <a:pPr algn="r"/>
+            <a:r>
+              <a:rPr sz="1800" b="1">
+                <a:solidFill>
+                  <a:srgbClr val="C47B2B"/>
+                </a:solidFill>
+                <a:latin typeface="Calibri"/>
+              </a:rPr>
+              <a:t>0.100</a:t>
+            </a:r>
+          </a:p>
+        </p:txBody>
+      </p:sp>
+      <p:sp>
+        <p:nvSpPr>
+          <p:cNvPr id="17" name="Rounded Rectangle 16"/>
+          <p:cNvSpPr/>
+          <p:nvPr/>
+        </p:nvSpPr>
+        <p:spPr>
+          <a:xfrm>
+            <a:off x="1097280" y="4343400"/>
+            <a:ext cx="9875520" cy="658368"/>
+          </a:xfrm>
+          <a:prstGeom prst="roundRect">
+            <a:avLst/>
+          </a:prstGeom>
+          <a:solidFill>
+            <a:srgbClr val="F4F7FA"/>
+          </a:solidFill>
+          <a:ln>
+            <a:solidFill>
+              <a:srgbClr val="1F7A8C"/>
+            </a:solidFill>
+          </a:ln>
+        </p:spPr>
+        <p:style>
+          <a:lnRef idx="1">
+            <a:schemeClr val="accent1"/>
+          </a:lnRef>
+          <a:fillRef idx="3">
+            <a:schemeClr val="accent1"/>
+          </a:fillRef>
+          <a:effectRef idx="2">
+            <a:schemeClr val="accent1"/>
+          </a:effectRef>
+          <a:fontRef idx="minor">
+            <a:schemeClr val="lt1"/>
+          </a:fontRef>
+        </p:style>
+        <p:txBody>
+          <a:bodyPr rtlCol="0" anchor="ctr"/>
+          <a:lstStyle/>
+          <a:p>
+            <a:pPr algn="ctr"/>
+          </a:p>
+        </p:txBody>
+      </p:sp>
+      <p:sp>
+        <p:nvSpPr>
+          <p:cNvPr id="18" name="TextBox 17"/>
+          <p:cNvSpPr txBox="1"/>
+          <p:nvPr/>
+        </p:nvSpPr>
+        <p:spPr>
+          <a:xfrm>
+            <a:off x="1325880" y="4480560"/>
+            <a:ext cx="6858000" cy="411480"/>
+          </a:xfrm>
+          <a:prstGeom prst="rect">
+            <a:avLst/>
+          </a:prstGeom>
+          <a:noFill/>
+        </p:spPr>
+        <p:txBody>
+          <a:bodyPr wrap="none">
+            <a:spAutoFit/>
+          </a:bodyPr>
+          <a:lstStyle/>
+          <a:p>
+            <a:r>
+              <a:rPr sz="1600" b="1">
+                <a:solidFill>
+                  <a:srgbClr val="0B3A5B"/>
+                </a:solidFill>
+                <a:latin typeface="Calibri"/>
+              </a:rPr>
+              <a:t>T2 telem logistic (recommended)</a:t>
+            </a:r>
+          </a:p>
+        </p:txBody>
+      </p:sp>
+      <p:sp>
+        <p:nvSpPr>
+          <p:cNvPr id="19" name="TextBox 18"/>
+          <p:cNvSpPr txBox="1"/>
+          <p:nvPr/>
+        </p:nvSpPr>
+        <p:spPr>
+          <a:xfrm>
+            <a:off x="8229600" y="4480560"/>
+            <a:ext cx="2468880" cy="411480"/>
+          </a:xfrm>
+          <a:prstGeom prst="rect">
+            <a:avLst/>
+          </a:prstGeom>
+          <a:noFill/>
+        </p:spPr>
+        <p:txBody>
+          <a:bodyPr wrap="none">
+            <a:spAutoFit/>
+          </a:bodyPr>
+          <a:lstStyle/>
+          <a:p>
+            <a:pPr algn="r"/>
+            <a:r>
+              <a:rPr sz="1800" b="1">
+                <a:solidFill>
+                  <a:srgbClr val="C47B2B"/>
+                </a:solidFill>
+                <a:latin typeface="Calibri"/>
+              </a:rPr>
+              <a:t>0.038</a:t>
+            </a:r>
+          </a:p>
+        </p:txBody>
+      </p:sp>
+      <p:sp>
+        <p:nvSpPr>
+          <p:cNvPr id="20" name="Rounded Rectangle 19"/>
+          <p:cNvSpPr/>
+          <p:nvPr/>
+        </p:nvSpPr>
+        <p:spPr>
+          <a:xfrm>
+            <a:off x="1097280" y="5120640"/>
+            <a:ext cx="9875520" cy="658368"/>
+          </a:xfrm>
+          <a:prstGeom prst="roundRect">
+            <a:avLst/>
+          </a:prstGeom>
+          <a:solidFill>
+            <a:srgbClr val="FFFFFF"/>
+          </a:solidFill>
+          <a:ln>
+            <a:solidFill>
+              <a:srgbClr val="1F7A8C"/>
+            </a:solidFill>
+          </a:ln>
+        </p:spPr>
+        <p:style>
+          <a:lnRef idx="1">
+            <a:schemeClr val="accent1"/>
+          </a:lnRef>
+          <a:fillRef idx="3">
+            <a:schemeClr val="accent1"/>
+          </a:fillRef>
+          <a:effectRef idx="2">
+            <a:schemeClr val="accent1"/>
+          </a:effectRef>
+          <a:fontRef idx="minor">
+            <a:schemeClr val="lt1"/>
+          </a:fontRef>
+        </p:style>
+        <p:txBody>
+          <a:bodyPr rtlCol="0" anchor="ctr"/>
+          <a:lstStyle/>
+          <a:p>
+            <a:pPr algn="ctr"/>
+          </a:p>
+        </p:txBody>
+      </p:sp>
+      <p:sp>
+        <p:nvSpPr>
+          <p:cNvPr id="21" name="TextBox 20"/>
+          <p:cNvSpPr txBox="1"/>
+          <p:nvPr/>
+        </p:nvSpPr>
+        <p:spPr>
+          <a:xfrm>
+            <a:off x="1325880" y="5257800"/>
+            <a:ext cx="6858000" cy="411480"/>
+          </a:xfrm>
+          <a:prstGeom prst="rect">
+            <a:avLst/>
+          </a:prstGeom>
+          <a:noFill/>
+        </p:spPr>
+        <p:txBody>
+          <a:bodyPr wrap="none">
+            <a:spAutoFit/>
+          </a:bodyPr>
+          <a:lstStyle/>
+          <a:p>
+            <a:r>
+              <a:rPr sz="1600" b="1">
+                <a:solidFill>
+                  <a:srgbClr val="0B3A5B"/>
+                </a:solidFill>
+                <a:latin typeface="Calibri"/>
+              </a:rPr>
+              <a:t>Twin gain under final T1 head</a:t>
+            </a:r>
+          </a:p>
+        </p:txBody>
+      </p:sp>
+      <p:sp>
+        <p:nvSpPr>
+          <p:cNvPr id="22" name="TextBox 21"/>
+          <p:cNvSpPr txBox="1"/>
+          <p:nvPr/>
+        </p:nvSpPr>
+        <p:spPr>
+          <a:xfrm>
+            <a:off x="8229600" y="5257800"/>
+            <a:ext cx="2468880" cy="411480"/>
+          </a:xfrm>
+          <a:prstGeom prst="rect">
+            <a:avLst/>
+          </a:prstGeom>
+          <a:noFill/>
+        </p:spPr>
+        <p:txBody>
+          <a:bodyPr wrap="none">
+            <a:spAutoFit/>
+          </a:bodyPr>
+          <a:lstStyle/>
+          <a:p>
+            <a:pPr algn="r"/>
+            <a:r>
+              <a:rPr sz="1800" b="1">
+                <a:solidFill>
+                  <a:srgbClr val="C47B2B"/>
+                </a:solidFill>
+                <a:latin typeface="Calibri"/>
+              </a:rPr>
+              <a:t>+0.000</a:t>
+            </a:r>
+          </a:p>
+        </p:txBody>
+      </p:sp>
+      <p:sp>
+        <p:nvSpPr>
+          <p:cNvPr id="23" name="TextBox 22"/>
           <p:cNvSpPr txBox="1"/>
           <p:nvPr/>
         </p:nvSpPr>
@@ -8181,7 +8379,7 @@
       </p:sp>
       <p:sp>
         <p:nvSpPr>
-          <p:cNvPr id="6" name="TextBox 5"/>
+          <p:cNvPr id="24" name="TextBox 23"/>
           <p:cNvSpPr txBox="1"/>
           <p:nvPr/>
         </p:nvSpPr>
@@ -8209,7 +8407,7 @@
                 </a:solidFill>
                 <a:latin typeface="Calibri"/>
               </a:rPr>
-              <a:t>26 / 34</a:t>
+              <a:t>26 / 35</a:t>
             </a:r>
           </a:p>
         </p:txBody>
@@ -8304,14 +8502,14 @@
                 </a:solidFill>
                 <a:latin typeface="Calibri"/>
               </a:rPr>
-              <a:t>T2 ROC / Precision–Recall (Primary Instance)</a:t>
+              <a:t>T1 ROC / Precision–Recall (Primary Instance)</a:t>
             </a:r>
           </a:p>
         </p:txBody>
       </p:sp>
       <p:pic>
         <p:nvPicPr>
-          <p:cNvPr id="4" name="Picture 3" descr="T2_v1.1.0-INST_roc_pr.png"/>
+          <p:cNvPr id="4" name="Picture 3" descr="T1_v1.1.0-INST_roc_pr.png"/>
           <p:cNvPicPr>
             <a:picLocks noChangeAspect="1"/>
           </p:cNvPicPr>
@@ -8326,7 +8524,7 @@
         <p:spPr>
           <a:xfrm>
             <a:off x="731520" y="1143000"/>
-            <a:ext cx="10698480" cy="4555499"/>
+            <a:ext cx="10698480" cy="3919757"/>
           </a:xfrm>
           <a:prstGeom prst="rect">
             <a:avLst/>
@@ -8397,7 +8595,7 @@
                 </a:solidFill>
                 <a:latin typeface="Calibri"/>
               </a:rPr>
-              <a:t>27 / 34</a:t>
+              <a:t>27 / 35</a:t>
             </a:r>
           </a:p>
         </p:txBody>
@@ -8492,48 +8690,14 @@
                 </a:solidFill>
                 <a:latin typeface="Calibri"/>
               </a:rPr>
-              <a:t>Calibration</a:t>
-            </a:r>
-          </a:p>
-        </p:txBody>
-      </p:sp>
-      <p:sp>
-        <p:nvSpPr>
-          <p:cNvPr id="4" name="TextBox 3"/>
-          <p:cNvSpPr txBox="1"/>
-          <p:nvPr/>
-        </p:nvSpPr>
-        <p:spPr>
-          <a:xfrm>
-            <a:off x="411480" y="621792"/>
-            <a:ext cx="11338560" cy="292608"/>
-          </a:xfrm>
-          <a:prstGeom prst="rect">
-            <a:avLst/>
-          </a:prstGeom>
-          <a:noFill/>
-        </p:spPr>
-        <p:txBody>
-          <a:bodyPr wrap="none">
-            <a:spAutoFit/>
-          </a:bodyPr>
-          <a:lstStyle/>
-          <a:p>
-            <a:r>
-              <a:rPr sz="1200" b="0">
-                <a:solidFill>
-                  <a:srgbClr val="C8D8E4"/>
-                </a:solidFill>
-                <a:latin typeface="Calibri"/>
-              </a:rPr>
-              <a:t>Optional Beta for probability display; AUPRC uses scores</a:t>
+              <a:t>T2 ROC / Precision–Recall (Primary Instance)</a:t>
             </a:r>
           </a:p>
         </p:txBody>
       </p:sp>
       <p:pic>
         <p:nvPicPr>
-          <p:cNvPr id="5" name="Picture 4" descr="T1_v1.1.0-INST_calibration.png"/>
+          <p:cNvPr id="4" name="Picture 3" descr="T2_v1.1.0-INST_roc_pr.png"/>
           <p:cNvPicPr>
             <a:picLocks noChangeAspect="1"/>
           </p:cNvPicPr>
@@ -8547,8 +8711,8 @@
         </p:blipFill>
         <p:spPr>
           <a:xfrm>
-            <a:off x="2926080" y="1188720"/>
-            <a:ext cx="6217920" cy="5604007"/>
+            <a:off x="731520" y="1143000"/>
+            <a:ext cx="10698480" cy="3919757"/>
           </a:xfrm>
           <a:prstGeom prst="rect">
             <a:avLst/>
@@ -8557,7 +8721,7 @@
       </p:pic>
       <p:sp>
         <p:nvSpPr>
-          <p:cNvPr id="6" name="TextBox 5"/>
+          <p:cNvPr id="5" name="TextBox 4"/>
           <p:cNvSpPr txBox="1"/>
           <p:nvPr/>
         </p:nvSpPr>
@@ -8591,7 +8755,7 @@
       </p:sp>
       <p:sp>
         <p:nvSpPr>
-          <p:cNvPr id="7" name="TextBox 6"/>
+          <p:cNvPr id="6" name="TextBox 5"/>
           <p:cNvSpPr txBox="1"/>
           <p:nvPr/>
         </p:nvSpPr>
@@ -8619,7 +8783,7 @@
                 </a:solidFill>
                 <a:latin typeface="Calibri"/>
               </a:rPr>
-              <a:t>28 / 34</a:t>
+              <a:t>28 / 35</a:t>
             </a:r>
           </a:p>
         </p:txBody>
@@ -8714,7 +8878,7 @@
                 </a:solidFill>
                 <a:latin typeface="Calibri"/>
               </a:rPr>
-              <a:t>Discussion</a:t>
+              <a:t>Calibration</a:t>
             </a:r>
           </a:p>
         </p:txBody>
@@ -8727,104 +8891,59 @@
         </p:nvSpPr>
         <p:spPr>
           <a:xfrm>
-            <a:off x="640080" y="1280160"/>
-            <a:ext cx="10972800" cy="5029200"/>
-          </a:xfrm>
-          <a:prstGeom prst="rect">
-            <a:avLst/>
-          </a:prstGeom>
-          <a:noFill/>
-        </p:spPr>
-        <p:txBody>
-          <a:bodyPr wrap="square">
-            <a:spAutoFit/>
-          </a:bodyPr>
-          <a:lstStyle/>
-          <a:p>
-            <a:pPr>
-              <a:spcAft>
-                <a:spcPts val="800"/>
-              </a:spcAft>
-            </a:pPr>
-            <a:r>
-              <a:rPr sz="1700" b="0">
-                <a:solidFill>
-                  <a:srgbClr val="1A1A1A"/>
-                </a:solidFill>
-                <a:latin typeface="Calibri"/>
-              </a:rPr>
-              <a:t>•  Feature enrichment is the primary T1 driver (+0.0575 vs v2)</a:t>
-            </a:r>
-          </a:p>
-          <a:p>
-            <a:pPr>
-              <a:spcAft>
-                <a:spcPts val="800"/>
-              </a:spcAft>
-            </a:pPr>
-            <a:r>
-              <a:rPr sz="1700" b="0">
-                <a:solidFill>
-                  <a:srgbClr val="1A1A1A"/>
-                </a:solidFill>
-                <a:latin typeface="Calibri"/>
-              </a:rPr>
-              <a:t>•  Anchored fusion preferred: higher mean AUPRC and simpler than stacking</a:t>
-            </a:r>
-          </a:p>
-          <a:p>
-            <a:pPr>
-              <a:spcAft>
-                <a:spcPts val="800"/>
-              </a:spcAft>
-            </a:pPr>
-            <a:r>
-              <a:rPr sz="1700" b="0">
-                <a:solidFill>
-                  <a:srgbClr val="1A1A1A"/>
-                </a:solidFill>
-                <a:latin typeface="Calibri"/>
-              </a:rPr>
-              <a:t>•  T2 remains telem-logistic under ultra-rare positives</a:t>
-            </a:r>
-          </a:p>
-          <a:p>
-            <a:pPr>
-              <a:spcAft>
-                <a:spcPts val="800"/>
-              </a:spcAft>
-            </a:pPr>
-            <a:r>
-              <a:rPr sz="1700" b="0">
-                <a:solidFill>
-                  <a:srgbClr val="1A1A1A"/>
-                </a:solidFill>
-                <a:latin typeface="Calibri"/>
-              </a:rPr>
-              <a:t>•  Twin contribution under final T1 head is near zero</a:t>
-            </a:r>
-          </a:p>
-          <a:p>
-            <a:pPr>
-              <a:spcAft>
-                <a:spcPts val="800"/>
-              </a:spcAft>
-            </a:pPr>
-            <a:r>
-              <a:rPr sz="1700" b="0">
-                <a:solidFill>
-                  <a:srgbClr val="1A1A1A"/>
-                </a:solidFill>
-                <a:latin typeface="Calibri"/>
-              </a:rPr>
-              <a:t>•  Value proposition: reproducible pipeline + honest statistics, not universal detector dominance</a:t>
-            </a:r>
-          </a:p>
-        </p:txBody>
-      </p:sp>
-      <p:sp>
-        <p:nvSpPr>
-          <p:cNvPr id="5" name="TextBox 4"/>
+            <a:off x="411480" y="621792"/>
+            <a:ext cx="11338560" cy="292608"/>
+          </a:xfrm>
+          <a:prstGeom prst="rect">
+            <a:avLst/>
+          </a:prstGeom>
+          <a:noFill/>
+        </p:spPr>
+        <p:txBody>
+          <a:bodyPr wrap="none">
+            <a:spAutoFit/>
+          </a:bodyPr>
+          <a:lstStyle/>
+          <a:p>
+            <a:r>
+              <a:rPr sz="1200" b="0">
+                <a:solidFill>
+                  <a:srgbClr val="C8D8E4"/>
+                </a:solidFill>
+                <a:latin typeface="Calibri"/>
+              </a:rPr>
+              <a:t>Optional Beta for probability display; AUPRC uses scores</a:t>
+            </a:r>
+          </a:p>
+        </p:txBody>
+      </p:sp>
+      <p:pic>
+        <p:nvPicPr>
+          <p:cNvPr id="5" name="Picture 4" descr="T1_v1.1.0-INST_calibration.png"/>
+          <p:cNvPicPr>
+            <a:picLocks noChangeAspect="1"/>
+          </p:cNvPicPr>
+          <p:nvPr/>
+        </p:nvPicPr>
+        <p:blipFill>
+          <a:blip r:embed="rId2"/>
+          <a:stretch>
+            <a:fillRect/>
+          </a:stretch>
+        </p:blipFill>
+        <p:spPr>
+          <a:xfrm>
+            <a:off x="2926080" y="1188720"/>
+            <a:ext cx="6217920" cy="6063039"/>
+          </a:xfrm>
+          <a:prstGeom prst="rect">
+            <a:avLst/>
+          </a:prstGeom>
+        </p:spPr>
+      </p:pic>
+      <p:sp>
+        <p:nvSpPr>
+          <p:cNvPr id="6" name="TextBox 5"/>
           <p:cNvSpPr txBox="1"/>
           <p:nvPr/>
         </p:nvSpPr>
@@ -8858,7 +8977,7 @@
       </p:sp>
       <p:sp>
         <p:nvSpPr>
-          <p:cNvPr id="6" name="TextBox 5"/>
+          <p:cNvPr id="7" name="TextBox 6"/>
           <p:cNvSpPr txBox="1"/>
           <p:nvPr/>
         </p:nvSpPr>
@@ -8886,7 +9005,7 @@
                 </a:solidFill>
                 <a:latin typeface="Calibri"/>
               </a:rPr>
-              <a:t>29 / 34</a:t>
+              <a:t>29 / 35</a:t>
             </a:r>
           </a:p>
         </p:txBody>
@@ -9171,7 +9290,7 @@
                 </a:solidFill>
                 <a:latin typeface="Calibri"/>
               </a:rPr>
-              <a:t>3 / 34</a:t>
+              <a:t>3 / 35</a:t>
             </a:r>
           </a:p>
         </p:txBody>
@@ -9266,7 +9385,7 @@
                 </a:solidFill>
                 <a:latin typeface="Calibri"/>
               </a:rPr>
-              <a:t>Limitations</a:t>
+              <a:t>Discussion</a:t>
             </a:r>
           </a:p>
         </p:txBody>
@@ -9299,13 +9418,13 @@
               </a:spcAft>
             </a:pPr>
             <a:r>
-              <a:rPr sz="1700" b="0">
+              <a:rPr sz="1600" b="0">
                 <a:solidFill>
                   <a:srgbClr val="1A1A1A"/>
                 </a:solidFill>
                 <a:latin typeface="Calibri"/>
               </a:rPr>
-              <a:t>•  Synthetic generator may over-structure causal chains (construct validity)</a:t>
+              <a:t>•  Leakage-safe feature enrichment is the primary T1 driver (+0.058 mean AUPRC vs v2)</a:t>
             </a:r>
           </a:p>
           <a:p>
@@ -9315,13 +9434,13 @@
               </a:spcAft>
             </a:pPr>
             <a:r>
-              <a:rPr sz="1700" b="0">
+              <a:rPr sz="1600" b="0">
                 <a:solidFill>
                   <a:srgbClr val="1A1A1A"/>
                 </a:solidFill>
                 <a:latin typeface="Calibri"/>
               </a:rPr>
-              <a:t>•  n = 6 yields wide CIs and underpowered paired tests</a:t>
+              <a:t>•  Anchored fusion preferred over stacking (higher mean AUPRC; stacking is a negative ablation)</a:t>
             </a:r>
           </a:p>
           <a:p>
@@ -9331,13 +9450,13 @@
               </a:spcAft>
             </a:pPr>
             <a:r>
-              <a:rPr sz="1700" b="0">
+              <a:rPr sz="1600" b="0">
                 <a:solidFill>
                   <a:srgbClr val="1A1A1A"/>
                 </a:solidFill>
                 <a:latin typeface="Calibri"/>
               </a:rPr>
-              <a:t>•  External validity requires production-trace evaluation</a:t>
+              <a:t>•  Mean T1 advantage vs RF is not statistically significant at n = 6 (p = 0.688)</a:t>
             </a:r>
           </a:p>
           <a:p>
@@ -9347,13 +9466,13 @@
               </a:spcAft>
             </a:pPr>
             <a:r>
-              <a:rPr sz="1700" b="0">
+              <a:rPr sz="1600" b="0">
                 <a:solidFill>
                   <a:srgbClr val="1A1A1A"/>
                 </a:solidFill>
                 <a:latin typeface="Calibri"/>
               </a:rPr>
-              <a:t>•  Healing with RCA-category features can be near-oracle—honest ablations required</a:t>
+              <a:t>•  TabNet and true GraphSAGE do not overturn the selected T1 head</a:t>
             </a:r>
           </a:p>
           <a:p>
@@ -9363,13 +9482,29 @@
               </a:spcAft>
             </a:pPr>
             <a:r>
-              <a:rPr sz="1700" b="0">
+              <a:rPr sz="1600" b="0">
                 <a:solidFill>
                   <a:srgbClr val="1A1A1A"/>
                 </a:solidFill>
                 <a:latin typeface="Calibri"/>
               </a:rPr>
-              <a:t>•  No live switch actuation in this study</a:t>
+              <a:t>•  T2 remains telem-logistic; twin gain under the final T1 head is near zero</a:t>
+            </a:r>
+          </a:p>
+          <a:p>
+            <a:pPr>
+              <a:spcAft>
+                <a:spcPts val="800"/>
+              </a:spcAft>
+            </a:pPr>
+            <a:r>
+              <a:rPr sz="1600" b="0">
+                <a:solidFill>
+                  <a:srgbClr val="1A1A1A"/>
+                </a:solidFill>
+                <a:latin typeface="Calibri"/>
+              </a:rPr>
+              <a:t>•  Value: reproducible benchmark + honest statistics—not universal detector dominance</a:t>
             </a:r>
           </a:p>
         </p:txBody>
@@ -9438,7 +9573,7 @@
                 </a:solidFill>
                 <a:latin typeface="Calibri"/>
               </a:rPr>
-              <a:t>30 / 34</a:t>
+              <a:t>30 / 35</a:t>
             </a:r>
           </a:p>
         </p:txBody>
@@ -9533,7 +9668,7 @@
                 </a:solidFill>
                 <a:latin typeface="Calibri"/>
               </a:rPr>
-              <a:t>Future Work</a:t>
+              <a:t>Limitations</a:t>
             </a:r>
           </a:p>
         </p:txBody>
@@ -9566,13 +9701,13 @@
               </a:spcAft>
             </a:pPr>
             <a:r>
-              <a:rPr sz="1800" b="0">
+              <a:rPr sz="1600" b="0">
                 <a:solidFill>
                   <a:srgbClr val="1A1A1A"/>
                 </a:solidFill>
                 <a:latin typeface="Calibri"/>
               </a:rPr>
-              <a:t>•  Larger topologies and longer traces</a:t>
+              <a:t>•  Synthetic generator may over-structure causal chains (construct validity)</a:t>
             </a:r>
           </a:p>
           <a:p>
@@ -9582,13 +9717,13 @@
               </a:spcAft>
             </a:pPr>
             <a:r>
-              <a:rPr sz="1800" b="0">
+              <a:rPr sz="1600" b="0">
                 <a:solidFill>
                   <a:srgbClr val="1A1A1A"/>
                 </a:solidFill>
                 <a:latin typeface="Calibri"/>
               </a:rPr>
-              <a:t>•  Production-telemetry calibration studies</a:t>
+              <a:t>•  n = 6 yields wide CIs and underpowered paired tests</a:t>
             </a:r>
           </a:p>
           <a:p>
@@ -9598,13 +9733,13 @@
               </a:spcAft>
             </a:pPr>
             <a:r>
-              <a:rPr sz="1800" b="0">
+              <a:rPr sz="1600" b="0">
                 <a:solidFill>
                   <a:srgbClr val="1A1A1A"/>
                 </a:solidFill>
                 <a:latin typeface="Calibri"/>
               </a:rPr>
-              <a:t>•  Human-in-the-loop healing approval workflows</a:t>
+              <a:t>•  External validity requires production-trace evaluation beyond AOS-CX-style assumptions</a:t>
             </a:r>
           </a:p>
           <a:p>
@@ -9614,13 +9749,29 @@
               </a:spcAft>
             </a:pPr>
             <a:r>
-              <a:rPr sz="1800" b="0">
+              <a:rPr sz="1600" b="0">
                 <a:solidFill>
                   <a:srgbClr val="1A1A1A"/>
                 </a:solidFill>
                 <a:latin typeface="Calibri"/>
               </a:rPr>
-              <a:t>•  Expanded multi-vendor schema realism mapping</a:t>
+              <a:t>•  Healing with RCA-category features can be near-oracle—honest no-category ablations required</a:t>
+            </a:r>
+          </a:p>
+          <a:p>
+            <a:pPr>
+              <a:spcAft>
+                <a:spcPts val="800"/>
+              </a:spcAft>
+            </a:pPr>
+            <a:r>
+              <a:rPr sz="1600" b="0">
+                <a:solidFill>
+                  <a:srgbClr val="1A1A1A"/>
+                </a:solidFill>
+                <a:latin typeface="Calibri"/>
+              </a:rPr>
+              <a:t>•  No live autonomous deployment on physical AOS-CX switches; healing is decision support only</a:t>
             </a:r>
           </a:p>
         </p:txBody>
@@ -9689,7 +9840,7 @@
                 </a:solidFill>
                 <a:latin typeface="Calibri"/>
               </a:rPr>
-              <a:t>31 / 34</a:t>
+              <a:t>31 / 35</a:t>
             </a:r>
           </a:p>
         </p:txBody>
@@ -9784,7 +9935,7 @@
                 </a:solidFill>
                 <a:latin typeface="Calibri"/>
               </a:rPr>
-              <a:t>Conclusion</a:t>
+              <a:t>Future Work</a:t>
             </a:r>
           </a:p>
         </p:txBody>
@@ -9817,13 +9968,13 @@
               </a:spcAft>
             </a:pPr>
             <a:r>
-              <a:rPr sz="1700" b="0">
+              <a:rPr sz="1800" b="0">
                 <a:solidFill>
                   <a:srgbClr val="1A1A1A"/>
                 </a:solidFill>
                 <a:latin typeface="Calibri"/>
               </a:rPr>
-              <a:t>•  ECN-v3 final T1 AUPRC 0.1152 exceeds RF 0.0758 and v2 0.0577 in mean</a:t>
+              <a:t>•  Larger topologies and longer traces</a:t>
             </a:r>
           </a:p>
           <a:p>
@@ -9833,13 +9984,13 @@
               </a:spcAft>
             </a:pPr>
             <a:r>
-              <a:rPr sz="1700" b="0">
+              <a:rPr sz="1800" b="0">
                 <a:solidFill>
                   <a:srgbClr val="1A1A1A"/>
                 </a:solidFill>
                 <a:latin typeface="Calibri"/>
               </a:rPr>
-              <a:t>•  Stacking ablation 0.0997 — negative result versus anchored fusion</a:t>
+              <a:t>•  Production-telemetry calibration studies</a:t>
             </a:r>
           </a:p>
           <a:p>
@@ -9849,13 +10000,13 @@
               </a:spcAft>
             </a:pPr>
             <a:r>
-              <a:rPr sz="1700" b="0">
+              <a:rPr sz="1800" b="0">
                 <a:solidFill>
                   <a:srgbClr val="1A1A1A"/>
                 </a:solidFill>
                 <a:latin typeface="Calibri"/>
               </a:rPr>
-              <a:t>•  Recommended T2 head: telem logistic 0.0380</a:t>
+              <a:t>•  Human-in-the-loop healing approval workflows</a:t>
             </a:r>
           </a:p>
           <a:p>
@@ -9865,29 +10016,13 @@
               </a:spcAft>
             </a:pPr>
             <a:r>
-              <a:rPr sz="1700" b="0">
+              <a:rPr sz="1800" b="0">
                 <a:solidFill>
                   <a:srgbClr val="1A1A1A"/>
                 </a:solidFill>
                 <a:latin typeface="Calibri"/>
               </a:rPr>
-              <a:t>•  Architecture: leakage-safe features + anchored fusion + TreeSHAP RCA</a:t>
-            </a:r>
-          </a:p>
-          <a:p>
-            <a:pPr>
-              <a:spcAft>
-                <a:spcPts val="800"/>
-              </a:spcAft>
-            </a:pPr>
-            <a:r>
-              <a:rPr sz="1700" b="0">
-                <a:solidFill>
-                  <a:srgbClr val="1A1A1A"/>
-                </a:solidFill>
-                <a:latin typeface="Calibri"/>
-              </a:rPr>
-              <a:t>•  Primary contribution: reproducible ECNetBench + complete cognitive NetOps pipeline</a:t>
+              <a:t>•  Expanded multi-vendor schema realism mapping</a:t>
             </a:r>
           </a:p>
         </p:txBody>
@@ -9956,7 +10091,7 @@
                 </a:solidFill>
                 <a:latin typeface="Calibri"/>
               </a:rPr>
-              <a:t>32 / 34</a:t>
+              <a:t>32 / 35</a:t>
             </a:r>
           </a:p>
         </p:txBody>
@@ -10051,7 +10186,7 @@
                 </a:solidFill>
                 <a:latin typeface="Calibri"/>
               </a:rPr>
-              <a:t>Reproducibility</a:t>
+              <a:t>Conclusion</a:t>
             </a:r>
           </a:p>
         </p:txBody>
@@ -10084,13 +10219,13 @@
               </a:spcAft>
             </a:pPr>
             <a:r>
-              <a:rPr sz="1700" b="0">
+              <a:rPr sz="1600" b="0">
                 <a:solidFill>
                   <a:srgbClr val="1A1A1A"/>
                 </a:solidFill>
                 <a:latin typeface="Calibri"/>
               </a:rPr>
-              <a:t>•  Repository: https://github.com/Audrey2023uh/Network-Multi-Agent</a:t>
+              <a:t>•  ECN-v3 final T1 AUPRC 0.115 is above RF 0.076 and v2 0.058 in mean (RF paired test non-significant)</a:t>
             </a:r>
           </a:p>
           <a:p>
@@ -10100,13 +10235,13 @@
               </a:spcAft>
             </a:pPr>
             <a:r>
-              <a:rPr sz="1700" b="0">
+              <a:rPr sz="1600" b="0">
                 <a:solidFill>
                   <a:srgbClr val="1A1A1A"/>
                 </a:solidFill>
                 <a:latin typeface="Calibri"/>
               </a:rPr>
-              <a:t>•  Manuscript: paper/overleaf/</a:t>
+              <a:t>•  Stacking ablation 0.100 — negative result versus anchored fusion</a:t>
             </a:r>
           </a:p>
           <a:p>
@@ -10116,13 +10251,13 @@
               </a:spcAft>
             </a:pPr>
             <a:r>
-              <a:rPr sz="1700" b="0">
+              <a:rPr sz="1600" b="0">
                 <a:solidFill>
                   <a:srgbClr val="1A1A1A"/>
                 </a:solidFill>
                 <a:latin typeface="Calibri"/>
               </a:rPr>
-              <a:t>•  Metrics: results/manuscript_ready_numbers.json</a:t>
+              <a:t>•  Recommended T2 head: telem logistic 0.038</a:t>
             </a:r>
           </a:p>
           <a:p>
@@ -10132,13 +10267,13 @@
               </a:spcAft>
             </a:pPr>
             <a:r>
-              <a:rPr sz="1700" b="0">
+              <a:rPr sz="1600" b="0">
                 <a:solidFill>
                   <a:srgbClr val="1A1A1A"/>
                 </a:solidFill>
                 <a:latin typeface="Calibri"/>
               </a:rPr>
-              <a:t>•  Figures: paper/overleaf/figures/ (vector PDF + 600 dpi PNG)</a:t>
+              <a:t>•  TabNet and true GraphSAGE do not outperform the selected T1 head</a:t>
             </a:r>
           </a:p>
           <a:p>
@@ -10148,13 +10283,29 @@
               </a:spcAft>
             </a:pPr>
             <a:r>
-              <a:rPr sz="1700" b="0">
+              <a:rPr sz="1600" b="0">
                 <a:solidFill>
                   <a:srgbClr val="1A1A1A"/>
                 </a:solidFill>
                 <a:latin typeface="Calibri"/>
               </a:rPr>
-              <a:t>•  This deck: presentation/build_network_journal_presentation.py</a:t>
+              <a:t>•  Architecture: leakage-safe features + anchored fusion + TreeSHAP RCA + healing decision support</a:t>
+            </a:r>
+          </a:p>
+          <a:p>
+            <a:pPr>
+              <a:spcAft>
+                <a:spcPts val="800"/>
+              </a:spcAft>
+            </a:pPr>
+            <a:r>
+              <a:rPr sz="1600" b="0">
+                <a:solidFill>
+                  <a:srgbClr val="1A1A1A"/>
+                </a:solidFill>
+                <a:latin typeface="Calibri"/>
+              </a:rPr>
+              <a:t>•  Primary contribution: reproducible ECNetBench + complete cognitive NetOps pipeline</a:t>
             </a:r>
           </a:p>
         </p:txBody>
@@ -10223,7 +10374,7 @@
                 </a:solidFill>
                 <a:latin typeface="Calibri"/>
               </a:rPr>
-              <a:t>33 / 34</a:t>
+              <a:t>33 / 35</a:t>
             </a:r>
           </a:p>
         </p:txBody>
@@ -10255,6 +10406,273 @@
         <p:spPr>
           <a:xfrm>
             <a:off x="0" y="0"/>
+            <a:ext cx="12191695" cy="960120"/>
+          </a:xfrm>
+          <a:prstGeom prst="rect">
+            <a:avLst/>
+          </a:prstGeom>
+          <a:solidFill>
+            <a:srgbClr val="0B3A5B"/>
+          </a:solidFill>
+          <a:ln>
+            <a:noFill/>
+          </a:ln>
+        </p:spPr>
+        <p:style>
+          <a:lnRef idx="1">
+            <a:schemeClr val="accent1"/>
+          </a:lnRef>
+          <a:fillRef idx="3">
+            <a:schemeClr val="accent1"/>
+          </a:fillRef>
+          <a:effectRef idx="2">
+            <a:schemeClr val="accent1"/>
+          </a:effectRef>
+          <a:fontRef idx="minor">
+            <a:schemeClr val="lt1"/>
+          </a:fontRef>
+        </p:style>
+        <p:txBody>
+          <a:bodyPr rtlCol="0" anchor="ctr"/>
+          <a:lstStyle/>
+          <a:p>
+            <a:pPr algn="ctr"/>
+          </a:p>
+        </p:txBody>
+      </p:sp>
+      <p:sp>
+        <p:nvSpPr>
+          <p:cNvPr id="3" name="TextBox 2"/>
+          <p:cNvSpPr txBox="1"/>
+          <p:nvPr/>
+        </p:nvSpPr>
+        <p:spPr>
+          <a:xfrm>
+            <a:off x="411480" y="201168"/>
+            <a:ext cx="11338560" cy="502920"/>
+          </a:xfrm>
+          <a:prstGeom prst="rect">
+            <a:avLst/>
+          </a:prstGeom>
+          <a:noFill/>
+        </p:spPr>
+        <p:txBody>
+          <a:bodyPr wrap="none">
+            <a:spAutoFit/>
+          </a:bodyPr>
+          <a:lstStyle/>
+          <a:p>
+            <a:r>
+              <a:rPr sz="2600" b="1">
+                <a:solidFill>
+                  <a:srgbClr val="FFFFFF"/>
+                </a:solidFill>
+                <a:latin typeface="Calibri"/>
+              </a:rPr>
+              <a:t>Reproducibility</a:t>
+            </a:r>
+          </a:p>
+        </p:txBody>
+      </p:sp>
+      <p:sp>
+        <p:nvSpPr>
+          <p:cNvPr id="4" name="TextBox 3"/>
+          <p:cNvSpPr txBox="1"/>
+          <p:nvPr/>
+        </p:nvSpPr>
+        <p:spPr>
+          <a:xfrm>
+            <a:off x="640080" y="1280160"/>
+            <a:ext cx="10972800" cy="5029200"/>
+          </a:xfrm>
+          <a:prstGeom prst="rect">
+            <a:avLst/>
+          </a:prstGeom>
+          <a:noFill/>
+        </p:spPr>
+        <p:txBody>
+          <a:bodyPr wrap="square">
+            <a:spAutoFit/>
+          </a:bodyPr>
+          <a:lstStyle/>
+          <a:p>
+            <a:pPr>
+              <a:spcAft>
+                <a:spcPts val="800"/>
+              </a:spcAft>
+            </a:pPr>
+            <a:r>
+              <a:rPr sz="1700" b="0">
+                <a:solidFill>
+                  <a:srgbClr val="1A1A1A"/>
+                </a:solidFill>
+                <a:latin typeface="Calibri"/>
+              </a:rPr>
+              <a:t>•  Repository: https://github.com/Audrey2023uh/Network-Multi-Agent</a:t>
+            </a:r>
+          </a:p>
+          <a:p>
+            <a:pPr>
+              <a:spcAft>
+                <a:spcPts val="800"/>
+              </a:spcAft>
+            </a:pPr>
+            <a:r>
+              <a:rPr sz="1700" b="0">
+                <a:solidFill>
+                  <a:srgbClr val="1A1A1A"/>
+                </a:solidFill>
+                <a:latin typeface="Calibri"/>
+              </a:rPr>
+              <a:t>•  Manuscript: paper/overleaf/</a:t>
+            </a:r>
+          </a:p>
+          <a:p>
+            <a:pPr>
+              <a:spcAft>
+                <a:spcPts val="800"/>
+              </a:spcAft>
+            </a:pPr>
+            <a:r>
+              <a:rPr sz="1700" b="0">
+                <a:solidFill>
+                  <a:srgbClr val="1A1A1A"/>
+                </a:solidFill>
+                <a:latin typeface="Calibri"/>
+              </a:rPr>
+              <a:t>•  Metrics: results/manuscript_ready_numbers.json</a:t>
+            </a:r>
+          </a:p>
+          <a:p>
+            <a:pPr>
+              <a:spcAft>
+                <a:spcPts val="800"/>
+              </a:spcAft>
+            </a:pPr>
+            <a:r>
+              <a:rPr sz="1700" b="0">
+                <a:solidFill>
+                  <a:srgbClr val="1A1A1A"/>
+                </a:solidFill>
+                <a:latin typeface="Calibri"/>
+              </a:rPr>
+              <a:t>•  Figures: paper/overleaf/figures/ (vector PDF + 600 dpi PNG)</a:t>
+            </a:r>
+          </a:p>
+          <a:p>
+            <a:pPr>
+              <a:spcAft>
+                <a:spcPts val="800"/>
+              </a:spcAft>
+            </a:pPr>
+            <a:r>
+              <a:rPr sz="1700" b="0">
+                <a:solidFill>
+                  <a:srgbClr val="1A1A1A"/>
+                </a:solidFill>
+                <a:latin typeface="Calibri"/>
+              </a:rPr>
+              <a:t>•  This deck: presentation/build_network_journal_presentation.py</a:t>
+            </a:r>
+          </a:p>
+        </p:txBody>
+      </p:sp>
+      <p:sp>
+        <p:nvSpPr>
+          <p:cNvPr id="5" name="TextBox 4"/>
+          <p:cNvSpPr txBox="1"/>
+          <p:nvPr/>
+        </p:nvSpPr>
+        <p:spPr>
+          <a:xfrm>
+            <a:off x="365760" y="6537960"/>
+            <a:ext cx="9144000" cy="256032"/>
+          </a:xfrm>
+          <a:prstGeom prst="rect">
+            <a:avLst/>
+          </a:prstGeom>
+          <a:noFill/>
+        </p:spPr>
+        <p:txBody>
+          <a:bodyPr wrap="none">
+            <a:spAutoFit/>
+          </a:bodyPr>
+          <a:lstStyle/>
+          <a:p>
+            <a:r>
+              <a:rPr sz="1000" b="0">
+                <a:solidFill>
+                  <a:srgbClr val="4A5568"/>
+                </a:solidFill>
+                <a:latin typeface="Calibri"/>
+              </a:rPr>
+              <a:t>ECNetBench · Enterprise Cognitive Network (ECN-v3)</a:t>
+            </a:r>
+          </a:p>
+        </p:txBody>
+      </p:sp>
+      <p:sp>
+        <p:nvSpPr>
+          <p:cNvPr id="6" name="TextBox 5"/>
+          <p:cNvSpPr txBox="1"/>
+          <p:nvPr/>
+        </p:nvSpPr>
+        <p:spPr>
+          <a:xfrm>
+            <a:off x="10515600" y="6537960"/>
+            <a:ext cx="1371600" cy="256032"/>
+          </a:xfrm>
+          <a:prstGeom prst="rect">
+            <a:avLst/>
+          </a:prstGeom>
+          <a:noFill/>
+        </p:spPr>
+        <p:txBody>
+          <a:bodyPr wrap="none">
+            <a:spAutoFit/>
+          </a:bodyPr>
+          <a:lstStyle/>
+          <a:p>
+            <a:pPr algn="r"/>
+            <a:r>
+              <a:rPr sz="1000" b="0">
+                <a:solidFill>
+                  <a:srgbClr val="4A5568"/>
+                </a:solidFill>
+                <a:latin typeface="Calibri"/>
+              </a:rPr>
+              <a:t>34 / 35</a:t>
+            </a:r>
+          </a:p>
+        </p:txBody>
+      </p:sp>
+    </p:spTree>
+  </p:cSld>
+  <p:clrMapOvr>
+    <a:masterClrMapping/>
+  </p:clrMapOvr>
+</p:sld>
+</file>
+
+<file path=ppt/slides/slide35.xml><?xml version="1.0" encoding="utf-8"?>
+<p:sld xmlns:a="http://schemas.openxmlformats.org/drawingml/2006/main" xmlns:p="http://schemas.openxmlformats.org/presentationml/2006/main" xmlns:r="http://schemas.openxmlformats.org/officeDocument/2006/relationships">
+  <p:cSld>
+    <p:spTree>
+      <p:nvGrpSpPr>
+        <p:cNvPr id="1" name=""/>
+        <p:cNvGrpSpPr/>
+        <p:nvPr/>
+      </p:nvGrpSpPr>
+      <p:grpSpPr/>
+      <p:sp>
+        <p:nvSpPr>
+          <p:cNvPr id="2" name="Rectangle 1"/>
+          <p:cNvSpPr/>
+          <p:nvPr/>
+        </p:nvSpPr>
+        <p:spPr>
+          <a:xfrm>
+            <a:off x="0" y="0"/>
             <a:ext cx="12191695" cy="6858000"/>
           </a:xfrm>
           <a:prstGeom prst="rect">
@@ -10878,7 +11296,7 @@
                 </a:solidFill>
                 <a:latin typeface="Calibri"/>
               </a:rPr>
-              <a:t>4 / 34</a:t>
+              <a:t>4 / 35</a:t>
             </a:r>
           </a:p>
         </p:txBody>
@@ -11129,7 +11547,7 @@
                 </a:solidFill>
                 <a:latin typeface="Calibri"/>
               </a:rPr>
-              <a:t>5 / 34</a:t>
+              <a:t>5 / 35</a:t>
             </a:r>
           </a:p>
         </p:txBody>
@@ -11279,7 +11697,7 @@
                 </a:solidFill>
                 <a:latin typeface="Calibri"/>
               </a:rPr>
-              <a:t>•  ECN-v3: Digital Twin + multi-agent detection–prediction–RCA–impact–healing</a:t>
+              <a:t>•  ECN-v3: Digital Twin + multi-agent detection–prediction–RCA–impact–healing decision support</a:t>
             </a:r>
           </a:p>
           <a:p>
@@ -11295,7 +11713,7 @@
                 </a:solidFill>
                 <a:latin typeface="Calibri"/>
               </a:rPr>
-              <a:t>•  Evidence-selected T1 head: enriched features + anchored fusion (not stacking)</a:t>
+              <a:t>•  Evidence-selected T1 head: enriched features + anchored fusion (stacking is a negative ablation)</a:t>
             </a:r>
           </a:p>
           <a:p>
@@ -11311,7 +11729,7 @@
                 </a:solidFill>
                 <a:latin typeface="Calibri"/>
               </a:rPr>
-              <a:t>•  TreeSHAP RCA and honest ablation / significance reporting</a:t>
+              <a:t>•  TreeSHAP RCA and honest ablation / significance reporting (RF paired test non-significant)</a:t>
             </a:r>
           </a:p>
           <a:p>
@@ -11396,7 +11814,7 @@
                 </a:solidFill>
                 <a:latin typeface="Calibri"/>
               </a:rPr>
-              <a:t>6 / 34</a:t>
+              <a:t>6 / 35</a:t>
             </a:r>
           </a:p>
         </p:txBody>
@@ -11562,7 +11980,7 @@
                 </a:solidFill>
                 <a:latin typeface="Calibri"/>
               </a:rPr>
-              <a:t>•  Strong tabular detectors remain competitive when features are informative</a:t>
+              <a:t>•  Strong tabular detectors (RF, boosting, logistic) remain competitive when features are informative</a:t>
             </a:r>
           </a:p>
           <a:p>
@@ -11578,7 +11996,7 @@
                 </a:solidFill>
                 <a:latin typeface="Calibri"/>
               </a:rPr>
-              <a:t>•  GNN proxies included for fairness; ECN uses an explicit twin graph rather than claiming GNN superiority</a:t>
+              <a:t>•  Deep baselines include TabNet and true GraphSAGE; a historical GNN proxy (LightGBM) is reported separately</a:t>
             </a:r>
           </a:p>
           <a:p>
@@ -11663,7 +12081,7 @@
                 </a:solidFill>
                 <a:latin typeface="Calibri"/>
               </a:rPr>
-              <a:t>7 / 34</a:t>
+              <a:t>7 / 35</a:t>
             </a:r>
           </a:p>
         </p:txBody>
@@ -11829,7 +12247,7 @@
                 </a:solidFill>
                 <a:latin typeface="Calibri"/>
               </a:rPr>
-              <a:t>•  Tasks: T1 anomaly, T2 failure horizon, T3 RCA, T4 impact, healing</a:t>
+              <a:t>•  Tasks: T1 anomaly, T2 failure horizon, T3 RCA, T4 impact, healing decision support</a:t>
             </a:r>
           </a:p>
           <a:p>
@@ -11954,7 +12372,7 @@
                 </a:solidFill>
                 <a:latin typeface="Calibri"/>
               </a:rPr>
-              <a:t>8 / 34</a:t>
+              <a:t>8 / 35</a:t>
             </a:r>
           </a:p>
         </p:txBody>
@@ -12142,7 +12560,7 @@
                 </a:solidFill>
                 <a:latin typeface="Calibri"/>
               </a:rPr>
-              <a:t>9 / 34</a:t>
+              <a:t>9 / 35</a:t>
             </a:r>
           </a:p>
         </p:txBody>
